--- a/output_pptx/This_I_Believe_The_Creed.pptx
+++ b/output_pptx/This_I_Believe_The_Creed.pptx
@@ -3130,23 +3130,23 @@
         </p:nvSpPr>
         <p:spPr>
           <a:xfrm>
-            <a:off x="594360" y="2258568"/>
-            <a:ext cx="11002975" cy="685800"/>
-          </a:xfrm>
-          <a:prstGeom prst="rect">
-            <a:avLst/>
-          </a:prstGeom>
-          <a:noFill/>
-        </p:spPr>
-        <p:txBody>
-          <a:bodyPr wrap="square">
-            <a:spAutoFit/>
-          </a:bodyPr>
-          <a:lstStyle/>
-          <a:p>
-            <a:pPr algn="ctr"/>
-            <a:r>
-              <a:rPr sz="4400" b="1" i="0">
+            <a:off x="640080" y="2052828"/>
+            <a:ext cx="10911535" cy="731520"/>
+          </a:xfrm>
+          <a:prstGeom prst="rect">
+            <a:avLst/>
+          </a:prstGeom>
+          <a:noFill/>
+        </p:spPr>
+        <p:txBody>
+          <a:bodyPr wrap="square">
+            <a:spAutoFit/>
+          </a:bodyPr>
+          <a:lstStyle/>
+          <a:p>
+            <a:pPr algn="ctr"/>
+            <a:r>
+              <a:rPr sz="4800" b="1" i="0">
                 <a:solidFill>
                   <a:srgbClr val="FFFFFF"/>
                 </a:solidFill>
@@ -3165,99 +3165,29 @@
         </p:nvSpPr>
         <p:spPr>
           <a:xfrm>
-            <a:off x="594360" y="2980944"/>
-            <a:ext cx="11002975" cy="347472"/>
-          </a:xfrm>
-          <a:prstGeom prst="rect">
-            <a:avLst/>
-          </a:prstGeom>
-          <a:noFill/>
-        </p:spPr>
-        <p:txBody>
-          <a:bodyPr wrap="square">
-            <a:spAutoFit/>
-          </a:bodyPr>
-          <a:lstStyle/>
-          <a:p>
-            <a:pPr algn="ctr"/>
-            <a:r>
-              <a:rPr sz="2200" b="0" i="1">
-                <a:solidFill>
-                  <a:srgbClr val="8C8C8C"/>
-                </a:solidFill>
-                <a:latin typeface="Arial"/>
-              </a:rPr>
-              <a:t/>
-            </a:r>
-          </a:p>
-        </p:txBody>
-      </p:sp>
-      <p:sp>
-        <p:nvSpPr>
-          <p:cNvPr id="4" name="TextBox 3"/>
-          <p:cNvSpPr txBox="1"/>
-          <p:nvPr/>
-        </p:nvSpPr>
-        <p:spPr>
-          <a:xfrm>
-            <a:off x="594360" y="3529584"/>
-            <a:ext cx="11002975" cy="685800"/>
-          </a:xfrm>
-          <a:prstGeom prst="rect">
-            <a:avLst/>
-          </a:prstGeom>
-          <a:noFill/>
-        </p:spPr>
-        <p:txBody>
-          <a:bodyPr wrap="square">
-            <a:spAutoFit/>
-          </a:bodyPr>
-          <a:lstStyle/>
-          <a:p>
-            <a:pPr algn="ctr"/>
-            <a:r>
-              <a:rPr sz="4400" b="1" i="0">
+            <a:off x="640080" y="2985516"/>
+            <a:ext cx="10911535" cy="731520"/>
+          </a:xfrm>
+          <a:prstGeom prst="rect">
+            <a:avLst/>
+          </a:prstGeom>
+          <a:noFill/>
+        </p:spPr>
+        <p:txBody>
+          <a:bodyPr wrap="square">
+            <a:spAutoFit/>
+          </a:bodyPr>
+          <a:lstStyle/>
+          <a:p>
+            <a:pPr algn="ctr"/>
+            <a:r>
+              <a:rPr sz="4800" b="1" i="0">
                 <a:solidFill>
                   <a:srgbClr val="FFFFFF"/>
                 </a:solidFill>
                 <a:latin typeface="Arial"/>
               </a:rPr>
               <a:t>Nosso Pai eterno</a:t>
-            </a:r>
-          </a:p>
-        </p:txBody>
-      </p:sp>
-      <p:sp>
-        <p:nvSpPr>
-          <p:cNvPr id="5" name="TextBox 4"/>
-          <p:cNvSpPr txBox="1"/>
-          <p:nvPr/>
-        </p:nvSpPr>
-        <p:spPr>
-          <a:xfrm>
-            <a:off x="594360" y="4251960"/>
-            <a:ext cx="11002975" cy="347472"/>
-          </a:xfrm>
-          <a:prstGeom prst="rect">
-            <a:avLst/>
-          </a:prstGeom>
-          <a:noFill/>
-        </p:spPr>
-        <p:txBody>
-          <a:bodyPr wrap="square">
-            <a:spAutoFit/>
-          </a:bodyPr>
-          <a:lstStyle/>
-          <a:p>
-            <a:pPr algn="ctr"/>
-            <a:r>
-              <a:rPr sz="2200" b="0" i="1">
-                <a:solidFill>
-                  <a:srgbClr val="8C8C8C"/>
-                </a:solidFill>
-                <a:latin typeface="Arial"/>
-              </a:rPr>
-              <a:t/>
             </a:r>
           </a:p>
         </p:txBody>
@@ -3296,23 +3226,23 @@
         </p:nvSpPr>
         <p:spPr>
           <a:xfrm>
-            <a:off x="594360" y="2258568"/>
-            <a:ext cx="11002975" cy="685800"/>
-          </a:xfrm>
-          <a:prstGeom prst="rect">
-            <a:avLst/>
-          </a:prstGeom>
-          <a:noFill/>
-        </p:spPr>
-        <p:txBody>
-          <a:bodyPr wrap="square">
-            <a:spAutoFit/>
-          </a:bodyPr>
-          <a:lstStyle/>
-          <a:p>
-            <a:pPr algn="ctr"/>
-            <a:r>
-              <a:rPr sz="4400" b="1" i="0">
+            <a:off x="640080" y="2052828"/>
+            <a:ext cx="10911535" cy="731520"/>
+          </a:xfrm>
+          <a:prstGeom prst="rect">
+            <a:avLst/>
+          </a:prstGeom>
+          <a:noFill/>
+        </p:spPr>
+        <p:txBody>
+          <a:bodyPr wrap="square">
+            <a:spAutoFit/>
+          </a:bodyPr>
+          <a:lstStyle/>
+          <a:p>
+            <a:pPr algn="ctr"/>
+            <a:r>
+              <a:rPr sz="4800" b="1" i="0">
                 <a:solidFill>
                   <a:srgbClr val="FFFFFF"/>
                 </a:solidFill>
@@ -3331,99 +3261,29 @@
         </p:nvSpPr>
         <p:spPr>
           <a:xfrm>
-            <a:off x="594360" y="2980944"/>
-            <a:ext cx="11002975" cy="347472"/>
-          </a:xfrm>
-          <a:prstGeom prst="rect">
-            <a:avLst/>
-          </a:prstGeom>
-          <a:noFill/>
-        </p:spPr>
-        <p:txBody>
-          <a:bodyPr wrap="square">
-            <a:spAutoFit/>
-          </a:bodyPr>
-          <a:lstStyle/>
-          <a:p>
-            <a:pPr algn="ctr"/>
-            <a:r>
-              <a:rPr sz="2200" b="0" i="1">
-                <a:solidFill>
-                  <a:srgbClr val="8C8C8C"/>
-                </a:solidFill>
-                <a:latin typeface="Arial"/>
-              </a:rPr>
-              <a:t/>
-            </a:r>
-          </a:p>
-        </p:txBody>
-      </p:sp>
-      <p:sp>
-        <p:nvSpPr>
-          <p:cNvPr id="4" name="TextBox 3"/>
-          <p:cNvSpPr txBox="1"/>
-          <p:nvPr/>
-        </p:nvSpPr>
-        <p:spPr>
-          <a:xfrm>
-            <a:off x="594360" y="3529584"/>
-            <a:ext cx="11002975" cy="685800"/>
-          </a:xfrm>
-          <a:prstGeom prst="rect">
-            <a:avLst/>
-          </a:prstGeom>
-          <a:noFill/>
-        </p:spPr>
-        <p:txBody>
-          <a:bodyPr wrap="square">
-            <a:spAutoFit/>
-          </a:bodyPr>
-          <a:lstStyle/>
-          <a:p>
-            <a:pPr algn="ctr"/>
-            <a:r>
-              <a:rPr sz="4400" b="1" i="0">
+            <a:off x="640080" y="2985516"/>
+            <a:ext cx="10911535" cy="731520"/>
+          </a:xfrm>
+          <a:prstGeom prst="rect">
+            <a:avLst/>
+          </a:prstGeom>
+          <a:noFill/>
+        </p:spPr>
+        <p:txBody>
+          <a:bodyPr wrap="square">
+            <a:spAutoFit/>
+          </a:bodyPr>
+          <a:lstStyle/>
+          <a:p>
+            <a:pPr algn="ctr"/>
+            <a:r>
+              <a:rPr sz="4800" b="1" i="0">
                 <a:solidFill>
                   <a:srgbClr val="FFFFFF"/>
                 </a:solidFill>
                 <a:latin typeface="Arial"/>
               </a:rPr>
               <a:t>Creio em Cristo, o Filho</a:t>
-            </a:r>
-          </a:p>
-        </p:txBody>
-      </p:sp>
-      <p:sp>
-        <p:nvSpPr>
-          <p:cNvPr id="5" name="TextBox 4"/>
-          <p:cNvSpPr txBox="1"/>
-          <p:nvPr/>
-        </p:nvSpPr>
-        <p:spPr>
-          <a:xfrm>
-            <a:off x="594360" y="4251960"/>
-            <a:ext cx="11002975" cy="347472"/>
-          </a:xfrm>
-          <a:prstGeom prst="rect">
-            <a:avLst/>
-          </a:prstGeom>
-          <a:noFill/>
-        </p:spPr>
-        <p:txBody>
-          <a:bodyPr wrap="square">
-            <a:spAutoFit/>
-          </a:bodyPr>
-          <a:lstStyle/>
-          <a:p>
-            <a:pPr algn="ctr"/>
-            <a:r>
-              <a:rPr sz="2200" b="0" i="1">
-                <a:solidFill>
-                  <a:srgbClr val="8C8C8C"/>
-                </a:solidFill>
-                <a:latin typeface="Arial"/>
-              </a:rPr>
-              <a:t/>
             </a:r>
           </a:p>
         </p:txBody>
@@ -3462,64 +3322,29 @@
         </p:nvSpPr>
         <p:spPr>
           <a:xfrm>
-            <a:off x="594360" y="2894076"/>
-            <a:ext cx="11002975" cy="685800"/>
-          </a:xfrm>
-          <a:prstGeom prst="rect">
-            <a:avLst/>
-          </a:prstGeom>
-          <a:noFill/>
-        </p:spPr>
-        <p:txBody>
-          <a:bodyPr wrap="square">
-            <a:spAutoFit/>
-          </a:bodyPr>
-          <a:lstStyle/>
-          <a:p>
-            <a:pPr algn="ctr"/>
-            <a:r>
-              <a:rPr sz="4400" b="1" i="0">
+            <a:off x="640080" y="2702052"/>
+            <a:ext cx="10911535" cy="731520"/>
+          </a:xfrm>
+          <a:prstGeom prst="rect">
+            <a:avLst/>
+          </a:prstGeom>
+          <a:noFill/>
+        </p:spPr>
+        <p:txBody>
+          <a:bodyPr wrap="square">
+            <a:spAutoFit/>
+          </a:bodyPr>
+          <a:lstStyle/>
+          <a:p>
+            <a:pPr algn="ctr"/>
+            <a:r>
+              <a:rPr sz="4800" b="1" i="0">
                 <a:solidFill>
                   <a:srgbClr val="FFFFFF"/>
                 </a:solidFill>
                 <a:latin typeface="Arial"/>
               </a:rPr>
               <a:t>Creio no Espírito Santo</a:t>
-            </a:r>
-          </a:p>
-        </p:txBody>
-      </p:sp>
-      <p:sp>
-        <p:nvSpPr>
-          <p:cNvPr id="3" name="TextBox 2"/>
-          <p:cNvSpPr txBox="1"/>
-          <p:nvPr/>
-        </p:nvSpPr>
-        <p:spPr>
-          <a:xfrm>
-            <a:off x="594360" y="3616452"/>
-            <a:ext cx="11002975" cy="347472"/>
-          </a:xfrm>
-          <a:prstGeom prst="rect">
-            <a:avLst/>
-          </a:prstGeom>
-          <a:noFill/>
-        </p:spPr>
-        <p:txBody>
-          <a:bodyPr wrap="square">
-            <a:spAutoFit/>
-          </a:bodyPr>
-          <a:lstStyle/>
-          <a:p>
-            <a:pPr algn="ctr"/>
-            <a:r>
-              <a:rPr sz="2200" b="0" i="1">
-                <a:solidFill>
-                  <a:srgbClr val="8C8C8C"/>
-                </a:solidFill>
-                <a:latin typeface="Arial"/>
-              </a:rPr>
-              <a:t/>
             </a:r>
           </a:p>
         </p:txBody>
@@ -3558,23 +3383,23 @@
         </p:nvSpPr>
         <p:spPr>
           <a:xfrm>
-            <a:off x="594360" y="1837944"/>
-            <a:ext cx="11002975" cy="685800"/>
-          </a:xfrm>
-          <a:prstGeom prst="rect">
-            <a:avLst/>
-          </a:prstGeom>
-          <a:noFill/>
-        </p:spPr>
-        <p:txBody>
-          <a:bodyPr wrap="square">
-            <a:spAutoFit/>
-          </a:bodyPr>
-          <a:lstStyle/>
-          <a:p>
-            <a:pPr algn="ctr"/>
-            <a:r>
-              <a:rPr sz="4400" b="1" i="0">
+            <a:off x="640080" y="1650492"/>
+            <a:ext cx="10911535" cy="731520"/>
+          </a:xfrm>
+          <a:prstGeom prst="rect">
+            <a:avLst/>
+          </a:prstGeom>
+          <a:noFill/>
+        </p:spPr>
+        <p:txBody>
+          <a:bodyPr wrap="square">
+            <a:spAutoFit/>
+          </a:bodyPr>
+          <a:lstStyle/>
+          <a:p>
+            <a:pPr algn="ctr"/>
+            <a:r>
+              <a:rPr sz="4800" b="1" i="0">
                 <a:solidFill>
                   <a:srgbClr val="FFFFFF"/>
                 </a:solidFill>
@@ -3593,8 +3418,8 @@
         </p:nvSpPr>
         <p:spPr>
           <a:xfrm>
-            <a:off x="594360" y="2560320"/>
-            <a:ext cx="11002975" cy="384048"/>
+            <a:off x="640080" y="2418588"/>
+            <a:ext cx="10911535" cy="365760"/>
           </a:xfrm>
           <a:prstGeom prst="rect">
             <a:avLst/>
@@ -3611,7 +3436,7 @@
             <a:r>
               <a:rPr sz="2400" b="0" i="1">
                 <a:solidFill>
-                  <a:srgbClr val="B4B4B4"/>
+                  <a:srgbClr val="AAAAAA"/>
                 </a:solidFill>
                 <a:latin typeface="Arial"/>
               </a:rPr>
@@ -3628,29 +3453,29 @@
         </p:nvSpPr>
         <p:spPr>
           <a:xfrm>
-            <a:off x="594360" y="2980944"/>
-            <a:ext cx="11002975" cy="347472"/>
-          </a:xfrm>
-          <a:prstGeom prst="rect">
-            <a:avLst/>
-          </a:prstGeom>
-          <a:noFill/>
-        </p:spPr>
-        <p:txBody>
-          <a:bodyPr wrap="square">
-            <a:spAutoFit/>
-          </a:bodyPr>
-          <a:lstStyle/>
-          <a:p>
-            <a:pPr algn="ctr"/>
-            <a:r>
-              <a:rPr sz="2000" b="0" i="1">
-                <a:solidFill>
-                  <a:srgbClr val="8C8C8C"/>
-                </a:solidFill>
-                <a:latin typeface="Arial"/>
-              </a:rPr>
-              <a:t/>
+            <a:off x="640080" y="2985516"/>
+            <a:ext cx="10911535" cy="731520"/>
+          </a:xfrm>
+          <a:prstGeom prst="rect">
+            <a:avLst/>
+          </a:prstGeom>
+          <a:noFill/>
+        </p:spPr>
+        <p:txBody>
+          <a:bodyPr wrap="square">
+            <a:spAutoFit/>
+          </a:bodyPr>
+          <a:lstStyle/>
+          <a:p>
+            <a:pPr algn="ctr"/>
+            <a:r>
+              <a:rPr sz="4800" b="1" i="0">
+                <a:solidFill>
+                  <a:srgbClr val="FFFFFF"/>
+                </a:solidFill>
+                <a:latin typeface="Arial"/>
+              </a:rPr>
+              <a:t>私の    ため  に  十 字 架 に</a:t>
             </a:r>
           </a:p>
         </p:txBody>
@@ -3663,43 +3488,8 @@
         </p:nvSpPr>
         <p:spPr>
           <a:xfrm>
-            <a:off x="594360" y="3529584"/>
-            <a:ext cx="11002975" cy="685800"/>
-          </a:xfrm>
-          <a:prstGeom prst="rect">
-            <a:avLst/>
-          </a:prstGeom>
-          <a:noFill/>
-        </p:spPr>
-        <p:txBody>
-          <a:bodyPr wrap="square">
-            <a:spAutoFit/>
-          </a:bodyPr>
-          <a:lstStyle/>
-          <a:p>
-            <a:pPr algn="ctr"/>
-            <a:r>
-              <a:rPr sz="4400" b="1" i="0">
-                <a:solidFill>
-                  <a:srgbClr val="FFFFFF"/>
-                </a:solidFill>
-                <a:latin typeface="Arial"/>
-              </a:rPr>
-              <a:t>私の    ため  に  十 字 架 に</a:t>
-            </a:r>
-          </a:p>
-        </p:txBody>
-      </p:sp>
-      <p:sp>
-        <p:nvSpPr>
-          <p:cNvPr id="6" name="TextBox 5"/>
-          <p:cNvSpPr txBox="1"/>
-          <p:nvPr/>
-        </p:nvSpPr>
-        <p:spPr>
-          <a:xfrm>
-            <a:off x="594360" y="4251960"/>
-            <a:ext cx="11002975" cy="384048"/>
+            <a:off x="640080" y="3753612"/>
+            <a:ext cx="10911535" cy="365760"/>
           </a:xfrm>
           <a:prstGeom prst="rect">
             <a:avLst/>
@@ -3716,46 +3506,11 @@
             <a:r>
               <a:rPr sz="2400" b="0" i="1">
                 <a:solidFill>
-                  <a:srgbClr val="B4B4B4"/>
+                  <a:srgbClr val="AAAAAA"/>
                 </a:solidFill>
                 <a:latin typeface="Arial"/>
               </a:rPr>
               <a:t>Watashino tame ni  Jyuujika ni</a:t>
-            </a:r>
-          </a:p>
-        </p:txBody>
-      </p:sp>
-      <p:sp>
-        <p:nvSpPr>
-          <p:cNvPr id="7" name="TextBox 6"/>
-          <p:cNvSpPr txBox="1"/>
-          <p:nvPr/>
-        </p:nvSpPr>
-        <p:spPr>
-          <a:xfrm>
-            <a:off x="594360" y="4672584"/>
-            <a:ext cx="11002975" cy="347472"/>
-          </a:xfrm>
-          <a:prstGeom prst="rect">
-            <a:avLst/>
-          </a:prstGeom>
-          <a:noFill/>
-        </p:spPr>
-        <p:txBody>
-          <a:bodyPr wrap="square">
-            <a:spAutoFit/>
-          </a:bodyPr>
-          <a:lstStyle/>
-          <a:p>
-            <a:pPr algn="ctr"/>
-            <a:r>
-              <a:rPr sz="2000" b="0" i="1">
-                <a:solidFill>
-                  <a:srgbClr val="8C8C8C"/>
-                </a:solidFill>
-                <a:latin typeface="Arial"/>
-              </a:rPr>
-              <a:t/>
             </a:r>
           </a:p>
         </p:txBody>
@@ -3794,23 +3549,23 @@
         </p:nvSpPr>
         <p:spPr>
           <a:xfrm>
-            <a:off x="594360" y="1837944"/>
-            <a:ext cx="11002975" cy="685800"/>
-          </a:xfrm>
-          <a:prstGeom prst="rect">
-            <a:avLst/>
-          </a:prstGeom>
-          <a:noFill/>
-        </p:spPr>
-        <p:txBody>
-          <a:bodyPr wrap="square">
-            <a:spAutoFit/>
-          </a:bodyPr>
-          <a:lstStyle/>
-          <a:p>
-            <a:pPr algn="ctr"/>
-            <a:r>
-              <a:rPr sz="4400" b="1" i="0">
+            <a:off x="640080" y="1650492"/>
+            <a:ext cx="10911535" cy="731520"/>
+          </a:xfrm>
+          <a:prstGeom prst="rect">
+            <a:avLst/>
+          </a:prstGeom>
+          <a:noFill/>
+        </p:spPr>
+        <p:txBody>
+          <a:bodyPr wrap="square">
+            <a:spAutoFit/>
+          </a:bodyPr>
+          <a:lstStyle/>
+          <a:p>
+            <a:pPr algn="ctr"/>
+            <a:r>
+              <a:rPr sz="4800" b="1" i="0">
                 <a:solidFill>
                   <a:srgbClr val="FFFFFF"/>
                 </a:solidFill>
@@ -3829,8 +3584,8 @@
         </p:nvSpPr>
         <p:spPr>
           <a:xfrm>
-            <a:off x="594360" y="2560320"/>
-            <a:ext cx="11002975" cy="384048"/>
+            <a:off x="640080" y="2418588"/>
+            <a:ext cx="10911535" cy="365760"/>
           </a:xfrm>
           <a:prstGeom prst="rect">
             <a:avLst/>
@@ -3847,7 +3602,7 @@
             <a:r>
               <a:rPr sz="2400" b="0" i="1">
                 <a:solidFill>
-                  <a:srgbClr val="B4B4B4"/>
+                  <a:srgbClr val="AAAAAA"/>
                 </a:solidFill>
                 <a:latin typeface="Arial"/>
               </a:rPr>
@@ -3864,29 +3619,29 @@
         </p:nvSpPr>
         <p:spPr>
           <a:xfrm>
-            <a:off x="594360" y="2980944"/>
-            <a:ext cx="11002975" cy="347472"/>
-          </a:xfrm>
-          <a:prstGeom prst="rect">
-            <a:avLst/>
-          </a:prstGeom>
-          <a:noFill/>
-        </p:spPr>
-        <p:txBody>
-          <a:bodyPr wrap="square">
-            <a:spAutoFit/>
-          </a:bodyPr>
-          <a:lstStyle/>
-          <a:p>
-            <a:pPr algn="ctr"/>
-            <a:r>
-              <a:rPr sz="2000" b="0" i="1">
-                <a:solidFill>
-                  <a:srgbClr val="8C8C8C"/>
-                </a:solidFill>
-                <a:latin typeface="Arial"/>
-              </a:rPr>
-              <a:t/>
+            <a:off x="640080" y="2985516"/>
+            <a:ext cx="10911535" cy="731520"/>
+          </a:xfrm>
+          <a:prstGeom prst="rect">
+            <a:avLst/>
+          </a:prstGeom>
+          <a:noFill/>
+        </p:spPr>
+        <p:txBody>
+          <a:bodyPr wrap="square">
+            <a:spAutoFit/>
+          </a:bodyPr>
+          <a:lstStyle/>
+          <a:p>
+            <a:pPr algn="ctr"/>
+            <a:r>
+              <a:rPr sz="4800" b="1" i="0">
+                <a:solidFill>
+                  <a:srgbClr val="FFFFFF"/>
+                </a:solidFill>
+                <a:latin typeface="Arial"/>
+              </a:rPr>
+              <a:t>命 吹 き 返した     いと高き 主よ</a:t>
             </a:r>
           </a:p>
         </p:txBody>
@@ -3899,43 +3654,8 @@
         </p:nvSpPr>
         <p:spPr>
           <a:xfrm>
-            <a:off x="594360" y="3529584"/>
-            <a:ext cx="11002975" cy="685800"/>
-          </a:xfrm>
-          <a:prstGeom prst="rect">
-            <a:avLst/>
-          </a:prstGeom>
-          <a:noFill/>
-        </p:spPr>
-        <p:txBody>
-          <a:bodyPr wrap="square">
-            <a:spAutoFit/>
-          </a:bodyPr>
-          <a:lstStyle/>
-          <a:p>
-            <a:pPr algn="ctr"/>
-            <a:r>
-              <a:rPr sz="4400" b="1" i="0">
-                <a:solidFill>
-                  <a:srgbClr val="FFFFFF"/>
-                </a:solidFill>
-                <a:latin typeface="Arial"/>
-              </a:rPr>
-              <a:t>命 吹 き 返した     いと高き 主よ</a:t>
-            </a:r>
-          </a:p>
-        </p:txBody>
-      </p:sp>
-      <p:sp>
-        <p:nvSpPr>
-          <p:cNvPr id="6" name="TextBox 5"/>
-          <p:cNvSpPr txBox="1"/>
-          <p:nvPr/>
-        </p:nvSpPr>
-        <p:spPr>
-          <a:xfrm>
-            <a:off x="594360" y="4251960"/>
-            <a:ext cx="11002975" cy="384048"/>
+            <a:off x="640080" y="3753612"/>
+            <a:ext cx="10911535" cy="365760"/>
           </a:xfrm>
           <a:prstGeom prst="rect">
             <a:avLst/>
@@ -3952,46 +3672,11 @@
             <a:r>
               <a:rPr sz="2400" b="0" i="1">
                 <a:solidFill>
-                  <a:srgbClr val="B4B4B4"/>
+                  <a:srgbClr val="AAAAAA"/>
                 </a:solidFill>
                 <a:latin typeface="Arial"/>
               </a:rPr>
               <a:t>inochi fuki kae shita  Ito takaki shuyo</a:t>
-            </a:r>
-          </a:p>
-        </p:txBody>
-      </p:sp>
-      <p:sp>
-        <p:nvSpPr>
-          <p:cNvPr id="7" name="TextBox 6"/>
-          <p:cNvSpPr txBox="1"/>
-          <p:nvPr/>
-        </p:nvSpPr>
-        <p:spPr>
-          <a:xfrm>
-            <a:off x="594360" y="4672584"/>
-            <a:ext cx="11002975" cy="347472"/>
-          </a:xfrm>
-          <a:prstGeom prst="rect">
-            <a:avLst/>
-          </a:prstGeom>
-          <a:noFill/>
-        </p:spPr>
-        <p:txBody>
-          <a:bodyPr wrap="square">
-            <a:spAutoFit/>
-          </a:bodyPr>
-          <a:lstStyle/>
-          <a:p>
-            <a:pPr algn="ctr"/>
-            <a:r>
-              <a:rPr sz="2000" b="0" i="1">
-                <a:solidFill>
-                  <a:srgbClr val="8C8C8C"/>
-                </a:solidFill>
-                <a:latin typeface="Arial"/>
-              </a:rPr>
-              <a:t/>
             </a:r>
           </a:p>
         </p:txBody>
@@ -4030,23 +3715,23 @@
         </p:nvSpPr>
         <p:spPr>
           <a:xfrm>
-            <a:off x="594360" y="1837944"/>
-            <a:ext cx="11002975" cy="685800"/>
-          </a:xfrm>
-          <a:prstGeom prst="rect">
-            <a:avLst/>
-          </a:prstGeom>
-          <a:noFill/>
-        </p:spPr>
-        <p:txBody>
-          <a:bodyPr wrap="square">
-            <a:spAutoFit/>
-          </a:bodyPr>
-          <a:lstStyle/>
-          <a:p>
-            <a:pPr algn="ctr"/>
-            <a:r>
-              <a:rPr sz="3520" b="1" i="0">
+            <a:off x="640080" y="1650492"/>
+            <a:ext cx="10911535" cy="731520"/>
+          </a:xfrm>
+          <a:prstGeom prst="rect">
+            <a:avLst/>
+          </a:prstGeom>
+          <a:noFill/>
+        </p:spPr>
+        <p:txBody>
+          <a:bodyPr wrap="square">
+            <a:spAutoFit/>
+          </a:bodyPr>
+          <a:lstStyle/>
+          <a:p>
+            <a:pPr algn="ctr"/>
+            <a:r>
+              <a:rPr sz="3800" b="1" i="0">
                 <a:solidFill>
                   <a:srgbClr val="FFFFFF"/>
                 </a:solidFill>
@@ -4065,25 +3750,25 @@
         </p:nvSpPr>
         <p:spPr>
           <a:xfrm>
-            <a:off x="594360" y="2560320"/>
-            <a:ext cx="11002975" cy="384048"/>
-          </a:xfrm>
-          <a:prstGeom prst="rect">
-            <a:avLst/>
-          </a:prstGeom>
-          <a:noFill/>
-        </p:spPr>
-        <p:txBody>
-          <a:bodyPr wrap="square">
-            <a:spAutoFit/>
-          </a:bodyPr>
-          <a:lstStyle/>
-          <a:p>
-            <a:pPr algn="ctr"/>
-            <a:r>
-              <a:rPr sz="2290" b="0" i="1">
-                <a:solidFill>
-                  <a:srgbClr val="B4B4B4"/>
+            <a:off x="640080" y="2418588"/>
+            <a:ext cx="10911535" cy="365760"/>
+          </a:xfrm>
+          <a:prstGeom prst="rect">
+            <a:avLst/>
+          </a:prstGeom>
+          <a:noFill/>
+        </p:spPr>
+        <p:txBody>
+          <a:bodyPr wrap="square">
+            <a:spAutoFit/>
+          </a:bodyPr>
+          <a:lstStyle/>
+          <a:p>
+            <a:pPr algn="ctr"/>
+            <a:r>
+              <a:rPr sz="2400" b="0" i="1">
+                <a:solidFill>
+                  <a:srgbClr val="AAAAAA"/>
                 </a:solidFill>
                 <a:latin typeface="Arial"/>
               </a:rPr>
@@ -4100,8 +3785,78 @@
         </p:nvSpPr>
         <p:spPr>
           <a:xfrm>
-            <a:off x="594360" y="2980944"/>
-            <a:ext cx="11002975" cy="347472"/>
+            <a:off x="640080" y="2985516"/>
+            <a:ext cx="10911535" cy="731520"/>
+          </a:xfrm>
+          <a:prstGeom prst="rect">
+            <a:avLst/>
+          </a:prstGeom>
+          <a:noFill/>
+        </p:spPr>
+        <p:txBody>
+          <a:bodyPr wrap="square">
+            <a:spAutoFit/>
+          </a:bodyPr>
+          <a:lstStyle/>
+          <a:p>
+            <a:pPr algn="ctr"/>
+            <a:r>
+              <a:rPr sz="4800" b="1" i="0">
+                <a:solidFill>
+                  <a:srgbClr val="FFFFFF"/>
+                </a:solidFill>
+                <a:latin typeface="Arial"/>
+              </a:rPr>
+              <a:t>聖霊のこの三位を　     私は信じる</a:t>
+            </a:r>
+          </a:p>
+        </p:txBody>
+      </p:sp>
+      <p:sp>
+        <p:nvSpPr>
+          <p:cNvPr id="5" name="TextBox 4"/>
+          <p:cNvSpPr txBox="1"/>
+          <p:nvPr/>
+        </p:nvSpPr>
+        <p:spPr>
+          <a:xfrm>
+            <a:off x="640080" y="3753612"/>
+            <a:ext cx="10911535" cy="365760"/>
+          </a:xfrm>
+          <a:prstGeom prst="rect">
+            <a:avLst/>
+          </a:prstGeom>
+          <a:noFill/>
+        </p:spPr>
+        <p:txBody>
+          <a:bodyPr wrap="square">
+            <a:spAutoFit/>
+          </a:bodyPr>
+          <a:lstStyle/>
+          <a:p>
+            <a:pPr algn="ctr"/>
+            <a:r>
+              <a:rPr sz="2400" b="0" i="1">
+                <a:solidFill>
+                  <a:srgbClr val="AAAAAA"/>
+                </a:solidFill>
+                <a:latin typeface="Arial"/>
+              </a:rPr>
+              <a:t>Seireinokono sanmiwo  Watashiwa shinjiru</a:t>
+            </a:r>
+          </a:p>
+        </p:txBody>
+      </p:sp>
+      <p:sp>
+        <p:nvSpPr>
+          <p:cNvPr id="6" name="TextBox 5"/>
+          <p:cNvSpPr txBox="1"/>
+          <p:nvPr/>
+        </p:nvSpPr>
+        <p:spPr>
+          <a:xfrm>
+            <a:off x="640080" y="4530852"/>
+            <a:ext cx="10911535" cy="310896"/>
           </a:xfrm>
           <a:prstGeom prst="rect">
             <a:avLst/>
@@ -4118,81 +3873,11 @@
             <a:r>
               <a:rPr sz="2000" b="0" i="1">
                 <a:solidFill>
-                  <a:srgbClr val="8C8C8C"/>
-                </a:solidFill>
-                <a:latin typeface="Arial"/>
-              </a:rPr>
-              <a:t/>
-            </a:r>
-          </a:p>
-        </p:txBody>
-      </p:sp>
-      <p:sp>
-        <p:nvSpPr>
-          <p:cNvPr id="5" name="TextBox 4"/>
-          <p:cNvSpPr txBox="1"/>
-          <p:nvPr/>
-        </p:nvSpPr>
-        <p:spPr>
-          <a:xfrm>
-            <a:off x="594360" y="3529584"/>
-            <a:ext cx="11002975" cy="685800"/>
-          </a:xfrm>
-          <a:prstGeom prst="rect">
-            <a:avLst/>
-          </a:prstGeom>
-          <a:noFill/>
-        </p:spPr>
-        <p:txBody>
-          <a:bodyPr wrap="square">
-            <a:spAutoFit/>
-          </a:bodyPr>
-          <a:lstStyle/>
-          <a:p>
-            <a:pPr algn="ctr"/>
-            <a:r>
-              <a:rPr sz="4400" b="1" i="0">
-                <a:solidFill>
-                  <a:srgbClr val="FFFFFF"/>
-                </a:solidFill>
-                <a:latin typeface="Arial"/>
-              </a:rPr>
-              <a:t>聖霊のこの三位を　     私は信じる</a:t>
-            </a:r>
-          </a:p>
-        </p:txBody>
-      </p:sp>
-      <p:sp>
-        <p:nvSpPr>
-          <p:cNvPr id="6" name="TextBox 5"/>
-          <p:cNvSpPr txBox="1"/>
-          <p:nvPr/>
-        </p:nvSpPr>
-        <p:spPr>
-          <a:xfrm>
-            <a:off x="594360" y="4251960"/>
-            <a:ext cx="11002975" cy="384048"/>
-          </a:xfrm>
-          <a:prstGeom prst="rect">
-            <a:avLst/>
-          </a:prstGeom>
-          <a:noFill/>
-        </p:spPr>
-        <p:txBody>
-          <a:bodyPr wrap="square">
-            <a:spAutoFit/>
-          </a:bodyPr>
-          <a:lstStyle/>
-          <a:p>
-            <a:pPr algn="ctr"/>
-            <a:r>
-              <a:rPr sz="2400" b="0" i="1">
-                <a:solidFill>
-                  <a:srgbClr val="B4B4B4"/>
-                </a:solidFill>
-                <a:latin typeface="Arial"/>
-              </a:rPr>
-              <a:t>Seireinokono sanmiwo  Watashiwa shinjiru</a:t>
+                  <a:srgbClr val="828282"/>
+                </a:solidFill>
+                <a:latin typeface="Arial"/>
+              </a:rPr>
+              <a:t>Jesus, nosso Salvador</a:t>
             </a:r>
           </a:p>
         </p:txBody>
@@ -4205,8 +3890,8 @@
         </p:nvSpPr>
         <p:spPr>
           <a:xfrm>
-            <a:off x="594360" y="4672584"/>
-            <a:ext cx="11002975" cy="347472"/>
+            <a:off x="640080" y="4896612"/>
+            <a:ext cx="10911535" cy="310896"/>
           </a:xfrm>
           <a:prstGeom prst="rect">
             <a:avLst/>
@@ -4223,11 +3908,11 @@
             <a:r>
               <a:rPr sz="2000" b="0" i="1">
                 <a:solidFill>
-                  <a:srgbClr val="8C8C8C"/>
-                </a:solidFill>
-                <a:latin typeface="Arial"/>
-              </a:rPr>
-              <a:t/>
+                  <a:srgbClr val="828282"/>
+                </a:solidFill>
+                <a:latin typeface="Arial"/>
+              </a:rPr>
+              <a:t>Creio em Deus, nosso Pai</a:t>
             </a:r>
           </a:p>
         </p:txBody>
@@ -4266,23 +3951,23 @@
         </p:nvSpPr>
         <p:spPr>
           <a:xfrm>
-            <a:off x="594360" y="1837944"/>
-            <a:ext cx="11002975" cy="685800"/>
-          </a:xfrm>
-          <a:prstGeom prst="rect">
-            <a:avLst/>
-          </a:prstGeom>
-          <a:noFill/>
-        </p:spPr>
-        <p:txBody>
-          <a:bodyPr wrap="square">
-            <a:spAutoFit/>
-          </a:bodyPr>
-          <a:lstStyle/>
-          <a:p>
-            <a:pPr algn="ctr"/>
-            <a:r>
-              <a:rPr sz="4400" b="1" i="0">
+            <a:off x="640080" y="1650492"/>
+            <a:ext cx="10911535" cy="731520"/>
+          </a:xfrm>
+          <a:prstGeom prst="rect">
+            <a:avLst/>
+          </a:prstGeom>
+          <a:noFill/>
+        </p:spPr>
+        <p:txBody>
+          <a:bodyPr wrap="square">
+            <a:spAutoFit/>
+          </a:bodyPr>
+          <a:lstStyle/>
+          <a:p>
+            <a:pPr algn="ctr"/>
+            <a:r>
+              <a:rPr sz="4800" b="1" i="0">
                 <a:solidFill>
                   <a:srgbClr val="FFFFFF"/>
                 </a:solidFill>
@@ -4301,8 +3986,8 @@
         </p:nvSpPr>
         <p:spPr>
           <a:xfrm>
-            <a:off x="594360" y="2560320"/>
-            <a:ext cx="11002975" cy="384048"/>
+            <a:off x="640080" y="2418588"/>
+            <a:ext cx="10911535" cy="365760"/>
           </a:xfrm>
           <a:prstGeom prst="rect">
             <a:avLst/>
@@ -4319,7 +4004,7 @@
             <a:r>
               <a:rPr sz="2400" b="0" i="1">
                 <a:solidFill>
-                  <a:srgbClr val="B4B4B4"/>
+                  <a:srgbClr val="AAAAAA"/>
                 </a:solidFill>
                 <a:latin typeface="Arial"/>
               </a:rPr>
@@ -4336,8 +4021,78 @@
         </p:nvSpPr>
         <p:spPr>
           <a:xfrm>
-            <a:off x="594360" y="2980944"/>
-            <a:ext cx="11002975" cy="347472"/>
+            <a:off x="640080" y="2985516"/>
+            <a:ext cx="10911535" cy="731520"/>
+          </a:xfrm>
+          <a:prstGeom prst="rect">
+            <a:avLst/>
+          </a:prstGeom>
+          <a:noFill/>
+        </p:spPr>
+        <p:txBody>
+          <a:bodyPr wrap="square">
+            <a:spAutoFit/>
+          </a:bodyPr>
+          <a:lstStyle/>
+          <a:p>
+            <a:pPr algn="ctr"/>
+            <a:r>
+              <a:rPr sz="4800" b="1" i="0">
+                <a:solidFill>
+                  <a:srgbClr val="FFFFFF"/>
+                </a:solidFill>
+                <a:latin typeface="Arial"/>
+              </a:rPr>
+              <a:t>主の御名で    私は        信じよう</a:t>
+            </a:r>
+          </a:p>
+        </p:txBody>
+      </p:sp>
+      <p:sp>
+        <p:nvSpPr>
+          <p:cNvPr id="5" name="TextBox 4"/>
+          <p:cNvSpPr txBox="1"/>
+          <p:nvPr/>
+        </p:nvSpPr>
+        <p:spPr>
+          <a:xfrm>
+            <a:off x="640080" y="3753612"/>
+            <a:ext cx="10911535" cy="365760"/>
+          </a:xfrm>
+          <a:prstGeom prst="rect">
+            <a:avLst/>
+          </a:prstGeom>
+          <a:noFill/>
+        </p:spPr>
+        <p:txBody>
+          <a:bodyPr wrap="square">
+            <a:spAutoFit/>
+          </a:bodyPr>
+          <a:lstStyle/>
+          <a:p>
+            <a:pPr algn="ctr"/>
+            <a:r>
+              <a:rPr sz="2400" b="0" i="1">
+                <a:solidFill>
+                  <a:srgbClr val="AAAAAA"/>
+                </a:solidFill>
+                <a:latin typeface="Arial"/>
+              </a:rPr>
+              <a:t>Shunominade watashiwa shinjiyou</a:t>
+            </a:r>
+          </a:p>
+        </p:txBody>
+      </p:sp>
+      <p:sp>
+        <p:nvSpPr>
+          <p:cNvPr id="6" name="TextBox 5"/>
+          <p:cNvSpPr txBox="1"/>
+          <p:nvPr/>
+        </p:nvSpPr>
+        <p:spPr>
+          <a:xfrm>
+            <a:off x="640080" y="4530852"/>
+            <a:ext cx="10911535" cy="310896"/>
           </a:xfrm>
           <a:prstGeom prst="rect">
             <a:avLst/>
@@ -4354,81 +4109,11 @@
             <a:r>
               <a:rPr sz="2000" b="0" i="1">
                 <a:solidFill>
-                  <a:srgbClr val="8C8C8C"/>
-                </a:solidFill>
-                <a:latin typeface="Arial"/>
-              </a:rPr>
-              <a:t/>
-            </a:r>
-          </a:p>
-        </p:txBody>
-      </p:sp>
-      <p:sp>
-        <p:nvSpPr>
-          <p:cNvPr id="5" name="TextBox 4"/>
-          <p:cNvSpPr txBox="1"/>
-          <p:nvPr/>
-        </p:nvSpPr>
-        <p:spPr>
-          <a:xfrm>
-            <a:off x="594360" y="3529584"/>
-            <a:ext cx="11002975" cy="685800"/>
-          </a:xfrm>
-          <a:prstGeom prst="rect">
-            <a:avLst/>
-          </a:prstGeom>
-          <a:noFill/>
-        </p:spPr>
-        <p:txBody>
-          <a:bodyPr wrap="square">
-            <a:spAutoFit/>
-          </a:bodyPr>
-          <a:lstStyle/>
-          <a:p>
-            <a:pPr algn="ctr"/>
-            <a:r>
-              <a:rPr sz="4400" b="1" i="0">
-                <a:solidFill>
-                  <a:srgbClr val="FFFFFF"/>
-                </a:solidFill>
-                <a:latin typeface="Arial"/>
-              </a:rPr>
-              <a:t>主の御名で    私は        信じよう</a:t>
-            </a:r>
-          </a:p>
-        </p:txBody>
-      </p:sp>
-      <p:sp>
-        <p:nvSpPr>
-          <p:cNvPr id="6" name="TextBox 5"/>
-          <p:cNvSpPr txBox="1"/>
-          <p:nvPr/>
-        </p:nvSpPr>
-        <p:spPr>
-          <a:xfrm>
-            <a:off x="594360" y="4251960"/>
-            <a:ext cx="11002975" cy="384048"/>
-          </a:xfrm>
-          <a:prstGeom prst="rect">
-            <a:avLst/>
-          </a:prstGeom>
-          <a:noFill/>
-        </p:spPr>
-        <p:txBody>
-          <a:bodyPr wrap="square">
-            <a:spAutoFit/>
-          </a:bodyPr>
-          <a:lstStyle/>
-          <a:p>
-            <a:pPr algn="ctr"/>
-            <a:r>
-              <a:rPr sz="2400" b="0" i="1">
-                <a:solidFill>
-                  <a:srgbClr val="B4B4B4"/>
-                </a:solidFill>
-                <a:latin typeface="Arial"/>
-              </a:rPr>
-              <a:t>Shunominade watashiwa shinjiyou</a:t>
+                  <a:srgbClr val="828282"/>
+                </a:solidFill>
+                <a:latin typeface="Arial"/>
+              </a:rPr>
+              <a:t>Creio em Cristo, o Filho</a:t>
             </a:r>
           </a:p>
         </p:txBody>
@@ -4441,8 +4126,8 @@
         </p:nvSpPr>
         <p:spPr>
           <a:xfrm>
-            <a:off x="594360" y="4672584"/>
-            <a:ext cx="11002975" cy="347472"/>
+            <a:off x="640080" y="4896612"/>
+            <a:ext cx="10911535" cy="310896"/>
           </a:xfrm>
           <a:prstGeom prst="rect">
             <a:avLst/>
@@ -4459,11 +4144,11 @@
             <a:r>
               <a:rPr sz="2000" b="0" i="1">
                 <a:solidFill>
-                  <a:srgbClr val="8C8C8C"/>
-                </a:solidFill>
-                <a:latin typeface="Arial"/>
-              </a:rPr>
-              <a:t/>
+                  <a:srgbClr val="828282"/>
+                </a:solidFill>
+                <a:latin typeface="Arial"/>
+              </a:rPr>
+              <a:t>Creio no Espírito Santo</a:t>
             </a:r>
           </a:p>
         </p:txBody>
@@ -4502,23 +4187,23 @@
         </p:nvSpPr>
         <p:spPr>
           <a:xfrm>
-            <a:off x="594360" y="2258568"/>
-            <a:ext cx="11002975" cy="685800"/>
-          </a:xfrm>
-          <a:prstGeom prst="rect">
-            <a:avLst/>
-          </a:prstGeom>
-          <a:noFill/>
-        </p:spPr>
-        <p:txBody>
-          <a:bodyPr wrap="square">
-            <a:spAutoFit/>
-          </a:bodyPr>
-          <a:lstStyle/>
-          <a:p>
-            <a:pPr algn="ctr"/>
-            <a:r>
-              <a:rPr sz="4400" b="1" i="0">
+            <a:off x="640080" y="2052828"/>
+            <a:ext cx="10911535" cy="731520"/>
+          </a:xfrm>
+          <a:prstGeom prst="rect">
+            <a:avLst/>
+          </a:prstGeom>
+          <a:noFill/>
+        </p:spPr>
+        <p:txBody>
+          <a:bodyPr wrap="square">
+            <a:spAutoFit/>
+          </a:bodyPr>
+          <a:lstStyle/>
+          <a:p>
+            <a:pPr algn="ctr"/>
+            <a:r>
+              <a:rPr sz="4800" b="1" i="0">
                 <a:solidFill>
                   <a:srgbClr val="FFFFFF"/>
                 </a:solidFill>
@@ -4537,99 +4222,29 @@
         </p:nvSpPr>
         <p:spPr>
           <a:xfrm>
-            <a:off x="594360" y="2980944"/>
-            <a:ext cx="11002975" cy="347472"/>
-          </a:xfrm>
-          <a:prstGeom prst="rect">
-            <a:avLst/>
-          </a:prstGeom>
-          <a:noFill/>
-        </p:spPr>
-        <p:txBody>
-          <a:bodyPr wrap="square">
-            <a:spAutoFit/>
-          </a:bodyPr>
-          <a:lstStyle/>
-          <a:p>
-            <a:pPr algn="ctr"/>
-            <a:r>
-              <a:rPr sz="2200" b="0" i="1">
-                <a:solidFill>
-                  <a:srgbClr val="8C8C8C"/>
-                </a:solidFill>
-                <a:latin typeface="Arial"/>
-              </a:rPr>
-              <a:t/>
-            </a:r>
-          </a:p>
-        </p:txBody>
-      </p:sp>
-      <p:sp>
-        <p:nvSpPr>
-          <p:cNvPr id="4" name="TextBox 3"/>
-          <p:cNvSpPr txBox="1"/>
-          <p:nvPr/>
-        </p:nvSpPr>
-        <p:spPr>
-          <a:xfrm>
-            <a:off x="594360" y="3529584"/>
-            <a:ext cx="11002975" cy="685800"/>
-          </a:xfrm>
-          <a:prstGeom prst="rect">
-            <a:avLst/>
-          </a:prstGeom>
-          <a:noFill/>
-        </p:spPr>
-        <p:txBody>
-          <a:bodyPr wrap="square">
-            <a:spAutoFit/>
-          </a:bodyPr>
-          <a:lstStyle/>
-          <a:p>
-            <a:pPr algn="ctr"/>
-            <a:r>
-              <a:rPr sz="4400" b="1" i="0">
+            <a:off x="640080" y="2985516"/>
+            <a:ext cx="10911535" cy="731520"/>
+          </a:xfrm>
+          <a:prstGeom prst="rect">
+            <a:avLst/>
+          </a:prstGeom>
+          <a:noFill/>
+        </p:spPr>
+        <p:txBody>
+          <a:bodyPr wrap="square">
+            <a:spAutoFit/>
+          </a:bodyPr>
+          <a:lstStyle/>
+          <a:p>
+            <a:pPr algn="ctr"/>
+            <a:r>
+              <a:rPr sz="4800" b="1" i="0">
                 <a:solidFill>
                   <a:srgbClr val="FFFFFF"/>
                 </a:solidFill>
                 <a:latin typeface="Arial"/>
               </a:rPr>
               <a:t>Nosso juiz e nosso defensor</a:t>
-            </a:r>
-          </a:p>
-        </p:txBody>
-      </p:sp>
-      <p:sp>
-        <p:nvSpPr>
-          <p:cNvPr id="5" name="TextBox 4"/>
-          <p:cNvSpPr txBox="1"/>
-          <p:nvPr/>
-        </p:nvSpPr>
-        <p:spPr>
-          <a:xfrm>
-            <a:off x="594360" y="4251960"/>
-            <a:ext cx="11002975" cy="347472"/>
-          </a:xfrm>
-          <a:prstGeom prst="rect">
-            <a:avLst/>
-          </a:prstGeom>
-          <a:noFill/>
-        </p:spPr>
-        <p:txBody>
-          <a:bodyPr wrap="square">
-            <a:spAutoFit/>
-          </a:bodyPr>
-          <a:lstStyle/>
-          <a:p>
-            <a:pPr algn="ctr"/>
-            <a:r>
-              <a:rPr sz="2200" b="0" i="1">
-                <a:solidFill>
-                  <a:srgbClr val="8C8C8C"/>
-                </a:solidFill>
-                <a:latin typeface="Arial"/>
-              </a:rPr>
-              <a:t/>
             </a:r>
           </a:p>
         </p:txBody>
@@ -4668,64 +4283,29 @@
         </p:nvSpPr>
         <p:spPr>
           <a:xfrm>
-            <a:off x="594360" y="2894076"/>
-            <a:ext cx="11002975" cy="685800"/>
-          </a:xfrm>
-          <a:prstGeom prst="rect">
-            <a:avLst/>
-          </a:prstGeom>
-          <a:noFill/>
-        </p:spPr>
-        <p:txBody>
-          <a:bodyPr wrap="square">
-            <a:spAutoFit/>
-          </a:bodyPr>
-          <a:lstStyle/>
-          <a:p>
-            <a:pPr algn="ctr"/>
-            <a:r>
-              <a:rPr sz="4400" b="1" i="0">
+            <a:off x="640080" y="2702052"/>
+            <a:ext cx="10911535" cy="731520"/>
+          </a:xfrm>
+          <a:prstGeom prst="rect">
+            <a:avLst/>
+          </a:prstGeom>
+          <a:noFill/>
+        </p:spPr>
+        <p:txBody>
+          <a:bodyPr wrap="square">
+            <a:spAutoFit/>
+          </a:bodyPr>
+          <a:lstStyle/>
+          <a:p>
+            <a:pPr algn="ctr"/>
+            <a:r>
+              <a:rPr sz="4800" b="1" i="0">
                 <a:solidFill>
                   <a:srgbClr val="FFFFFF"/>
                 </a:solidFill>
                 <a:latin typeface="Arial"/>
               </a:rPr>
               <a:t>Sofreu e foi crucificado</a:t>
-            </a:r>
-          </a:p>
-        </p:txBody>
-      </p:sp>
-      <p:sp>
-        <p:nvSpPr>
-          <p:cNvPr id="3" name="TextBox 2"/>
-          <p:cNvSpPr txBox="1"/>
-          <p:nvPr/>
-        </p:nvSpPr>
-        <p:spPr>
-          <a:xfrm>
-            <a:off x="594360" y="3616452"/>
-            <a:ext cx="11002975" cy="347472"/>
-          </a:xfrm>
-          <a:prstGeom prst="rect">
-            <a:avLst/>
-          </a:prstGeom>
-          <a:noFill/>
-        </p:spPr>
-        <p:txBody>
-          <a:bodyPr wrap="square">
-            <a:spAutoFit/>
-          </a:bodyPr>
-          <a:lstStyle/>
-          <a:p>
-            <a:pPr algn="ctr"/>
-            <a:r>
-              <a:rPr sz="2200" b="0" i="1">
-                <a:solidFill>
-                  <a:srgbClr val="8C8C8C"/>
-                </a:solidFill>
-                <a:latin typeface="Arial"/>
-              </a:rPr>
-              <a:t/>
             </a:r>
           </a:p>
         </p:txBody>
@@ -4764,23 +4344,23 @@
         </p:nvSpPr>
         <p:spPr>
           <a:xfrm>
-            <a:off x="594360" y="1837944"/>
-            <a:ext cx="11002975" cy="685800"/>
-          </a:xfrm>
-          <a:prstGeom prst="rect">
-            <a:avLst/>
-          </a:prstGeom>
-          <a:noFill/>
-        </p:spPr>
-        <p:txBody>
-          <a:bodyPr wrap="square">
-            <a:spAutoFit/>
-          </a:bodyPr>
-          <a:lstStyle/>
-          <a:p>
-            <a:pPr algn="ctr"/>
-            <a:r>
-              <a:rPr sz="3520" b="1" i="0">
+            <a:off x="640080" y="1650492"/>
+            <a:ext cx="10911535" cy="731520"/>
+          </a:xfrm>
+          <a:prstGeom prst="rect">
+            <a:avLst/>
+          </a:prstGeom>
+          <a:noFill/>
+        </p:spPr>
+        <p:txBody>
+          <a:bodyPr wrap="square">
+            <a:spAutoFit/>
+          </a:bodyPr>
+          <a:lstStyle/>
+          <a:p>
+            <a:pPr algn="ctr"/>
+            <a:r>
+              <a:rPr sz="3800" b="1" i="0">
                 <a:solidFill>
                   <a:srgbClr val="FFFFFF"/>
                 </a:solidFill>
@@ -4799,25 +4379,25 @@
         </p:nvSpPr>
         <p:spPr>
           <a:xfrm>
-            <a:off x="594360" y="2560320"/>
-            <a:ext cx="11002975" cy="384048"/>
-          </a:xfrm>
-          <a:prstGeom prst="rect">
-            <a:avLst/>
-          </a:prstGeom>
-          <a:noFill/>
-        </p:spPr>
-        <p:txBody>
-          <a:bodyPr wrap="square">
-            <a:spAutoFit/>
-          </a:bodyPr>
-          <a:lstStyle/>
-          <a:p>
-            <a:pPr algn="ctr"/>
-            <a:r>
-              <a:rPr sz="2290" b="0" i="1">
-                <a:solidFill>
-                  <a:srgbClr val="B4B4B4"/>
+            <a:off x="640080" y="2418588"/>
+            <a:ext cx="10911535" cy="365760"/>
+          </a:xfrm>
+          <a:prstGeom prst="rect">
+            <a:avLst/>
+          </a:prstGeom>
+          <a:noFill/>
+        </p:spPr>
+        <p:txBody>
+          <a:bodyPr wrap="square">
+            <a:spAutoFit/>
+          </a:bodyPr>
+          <a:lstStyle/>
+          <a:p>
+            <a:pPr algn="ctr"/>
+            <a:r>
+              <a:rPr sz="2400" b="0" i="1">
+                <a:solidFill>
+                  <a:srgbClr val="AAAAAA"/>
                 </a:solidFill>
                 <a:latin typeface="Arial"/>
               </a:rPr>
@@ -4834,8 +4414,78 @@
         </p:nvSpPr>
         <p:spPr>
           <a:xfrm>
-            <a:off x="594360" y="2980944"/>
-            <a:ext cx="11002975" cy="347472"/>
+            <a:off x="640080" y="2985516"/>
+            <a:ext cx="10911535" cy="731520"/>
+          </a:xfrm>
+          <a:prstGeom prst="rect">
+            <a:avLst/>
+          </a:prstGeom>
+          <a:noFill/>
+        </p:spPr>
+        <p:txBody>
+          <a:bodyPr wrap="square">
+            <a:spAutoFit/>
+          </a:bodyPr>
+          <a:lstStyle/>
+          <a:p>
+            <a:pPr algn="ctr"/>
+            <a:r>
+              <a:rPr sz="4800" b="1" i="0">
+                <a:solidFill>
+                  <a:srgbClr val="FFFFFF"/>
+                </a:solidFill>
+                <a:latin typeface="Arial"/>
+              </a:rPr>
+              <a:t>聖霊のこの三位を　     私は信じる</a:t>
+            </a:r>
+          </a:p>
+        </p:txBody>
+      </p:sp>
+      <p:sp>
+        <p:nvSpPr>
+          <p:cNvPr id="5" name="TextBox 4"/>
+          <p:cNvSpPr txBox="1"/>
+          <p:nvPr/>
+        </p:nvSpPr>
+        <p:spPr>
+          <a:xfrm>
+            <a:off x="640080" y="3753612"/>
+            <a:ext cx="10911535" cy="365760"/>
+          </a:xfrm>
+          <a:prstGeom prst="rect">
+            <a:avLst/>
+          </a:prstGeom>
+          <a:noFill/>
+        </p:spPr>
+        <p:txBody>
+          <a:bodyPr wrap="square">
+            <a:spAutoFit/>
+          </a:bodyPr>
+          <a:lstStyle/>
+          <a:p>
+            <a:pPr algn="ctr"/>
+            <a:r>
+              <a:rPr sz="2400" b="0" i="1">
+                <a:solidFill>
+                  <a:srgbClr val="AAAAAA"/>
+                </a:solidFill>
+                <a:latin typeface="Arial"/>
+              </a:rPr>
+              <a:t>Seireinokono sanmiwo  Watashiwa shinjiru</a:t>
+            </a:r>
+          </a:p>
+        </p:txBody>
+      </p:sp>
+      <p:sp>
+        <p:nvSpPr>
+          <p:cNvPr id="6" name="TextBox 5"/>
+          <p:cNvSpPr txBox="1"/>
+          <p:nvPr/>
+        </p:nvSpPr>
+        <p:spPr>
+          <a:xfrm>
+            <a:off x="640080" y="4530852"/>
+            <a:ext cx="10911535" cy="310896"/>
           </a:xfrm>
           <a:prstGeom prst="rect">
             <a:avLst/>
@@ -4852,81 +4502,11 @@
             <a:r>
               <a:rPr sz="2000" b="0" i="1">
                 <a:solidFill>
-                  <a:srgbClr val="8C8C8C"/>
-                </a:solidFill>
-                <a:latin typeface="Arial"/>
-              </a:rPr>
-              <a:t/>
-            </a:r>
-          </a:p>
-        </p:txBody>
-      </p:sp>
-      <p:sp>
-        <p:nvSpPr>
-          <p:cNvPr id="5" name="TextBox 4"/>
-          <p:cNvSpPr txBox="1"/>
-          <p:nvPr/>
-        </p:nvSpPr>
-        <p:spPr>
-          <a:xfrm>
-            <a:off x="594360" y="3529584"/>
-            <a:ext cx="11002975" cy="685800"/>
-          </a:xfrm>
-          <a:prstGeom prst="rect">
-            <a:avLst/>
-          </a:prstGeom>
-          <a:noFill/>
-        </p:spPr>
-        <p:txBody>
-          <a:bodyPr wrap="square">
-            <a:spAutoFit/>
-          </a:bodyPr>
-          <a:lstStyle/>
-          <a:p>
-            <a:pPr algn="ctr"/>
-            <a:r>
-              <a:rPr sz="4400" b="1" i="0">
-                <a:solidFill>
-                  <a:srgbClr val="FFFFFF"/>
-                </a:solidFill>
-                <a:latin typeface="Arial"/>
-              </a:rPr>
-              <a:t>聖霊のこの三位を　     私は信じる</a:t>
-            </a:r>
-          </a:p>
-        </p:txBody>
-      </p:sp>
-      <p:sp>
-        <p:nvSpPr>
-          <p:cNvPr id="6" name="TextBox 5"/>
-          <p:cNvSpPr txBox="1"/>
-          <p:nvPr/>
-        </p:nvSpPr>
-        <p:spPr>
-          <a:xfrm>
-            <a:off x="594360" y="4251960"/>
-            <a:ext cx="11002975" cy="384048"/>
-          </a:xfrm>
-          <a:prstGeom prst="rect">
-            <a:avLst/>
-          </a:prstGeom>
-          <a:noFill/>
-        </p:spPr>
-        <p:txBody>
-          <a:bodyPr wrap="square">
-            <a:spAutoFit/>
-          </a:bodyPr>
-          <a:lstStyle/>
-          <a:p>
-            <a:pPr algn="ctr"/>
-            <a:r>
-              <a:rPr sz="2400" b="0" i="1">
-                <a:solidFill>
-                  <a:srgbClr val="B4B4B4"/>
-                </a:solidFill>
-                <a:latin typeface="Arial"/>
-              </a:rPr>
-              <a:t>Seireinokono sanmiwo  Watashiwa shinjiru</a:t>
+                  <a:srgbClr val="828282"/>
+                </a:solidFill>
+                <a:latin typeface="Arial"/>
+              </a:rPr>
+              <a:t>Jesus, nosso Salvador</a:t>
             </a:r>
           </a:p>
         </p:txBody>
@@ -4939,8 +4519,8 @@
         </p:nvSpPr>
         <p:spPr>
           <a:xfrm>
-            <a:off x="594360" y="4672584"/>
-            <a:ext cx="11002975" cy="347472"/>
+            <a:off x="640080" y="4896612"/>
+            <a:ext cx="10911535" cy="310896"/>
           </a:xfrm>
           <a:prstGeom prst="rect">
             <a:avLst/>
@@ -4957,11 +4537,11 @@
             <a:r>
               <a:rPr sz="2000" b="0" i="1">
                 <a:solidFill>
-                  <a:srgbClr val="8C8C8C"/>
-                </a:solidFill>
-                <a:latin typeface="Arial"/>
-              </a:rPr>
-              <a:t/>
+                  <a:srgbClr val="828282"/>
+                </a:solidFill>
+                <a:latin typeface="Arial"/>
+              </a:rPr>
+              <a:t>Creio em Deus, nosso Pai</a:t>
             </a:r>
           </a:p>
         </p:txBody>
@@ -5000,23 +4580,23 @@
         </p:nvSpPr>
         <p:spPr>
           <a:xfrm>
-            <a:off x="594360" y="1837944"/>
-            <a:ext cx="11002975" cy="685800"/>
-          </a:xfrm>
-          <a:prstGeom prst="rect">
-            <a:avLst/>
-          </a:prstGeom>
-          <a:noFill/>
-        </p:spPr>
-        <p:txBody>
-          <a:bodyPr wrap="square">
-            <a:spAutoFit/>
-          </a:bodyPr>
-          <a:lstStyle/>
-          <a:p>
-            <a:pPr algn="ctr"/>
-            <a:r>
-              <a:rPr sz="4400" b="1" i="0">
+            <a:off x="640080" y="1650492"/>
+            <a:ext cx="10911535" cy="731520"/>
+          </a:xfrm>
+          <a:prstGeom prst="rect">
+            <a:avLst/>
+          </a:prstGeom>
+          <a:noFill/>
+        </p:spPr>
+        <p:txBody>
+          <a:bodyPr wrap="square">
+            <a:spAutoFit/>
+          </a:bodyPr>
+          <a:lstStyle/>
+          <a:p>
+            <a:pPr algn="ctr"/>
+            <a:r>
+              <a:rPr sz="4800" b="1" i="0">
                 <a:solidFill>
                   <a:srgbClr val="FFFFFF"/>
                 </a:solidFill>
@@ -5035,8 +4615,8 @@
         </p:nvSpPr>
         <p:spPr>
           <a:xfrm>
-            <a:off x="594360" y="2560320"/>
-            <a:ext cx="11002975" cy="384048"/>
+            <a:off x="640080" y="2418588"/>
+            <a:ext cx="10911535" cy="365760"/>
           </a:xfrm>
           <a:prstGeom prst="rect">
             <a:avLst/>
@@ -5053,7 +4633,7 @@
             <a:r>
               <a:rPr sz="2400" b="0" i="1">
                 <a:solidFill>
-                  <a:srgbClr val="B4B4B4"/>
+                  <a:srgbClr val="AAAAAA"/>
                 </a:solidFill>
                 <a:latin typeface="Arial"/>
               </a:rPr>
@@ -5070,8 +4650,78 @@
         </p:nvSpPr>
         <p:spPr>
           <a:xfrm>
-            <a:off x="594360" y="2980944"/>
-            <a:ext cx="11002975" cy="347472"/>
+            <a:off x="640080" y="2985516"/>
+            <a:ext cx="10911535" cy="731520"/>
+          </a:xfrm>
+          <a:prstGeom prst="rect">
+            <a:avLst/>
+          </a:prstGeom>
+          <a:noFill/>
+        </p:spPr>
+        <p:txBody>
+          <a:bodyPr wrap="square">
+            <a:spAutoFit/>
+          </a:bodyPr>
+          <a:lstStyle/>
+          <a:p>
+            <a:pPr algn="ctr"/>
+            <a:r>
+              <a:rPr sz="4800" b="1" i="0">
+                <a:solidFill>
+                  <a:srgbClr val="FFFFFF"/>
+                </a:solidFill>
+                <a:latin typeface="Arial"/>
+              </a:rPr>
+              <a:t>主の御名で    私は        信じよう</a:t>
+            </a:r>
+          </a:p>
+        </p:txBody>
+      </p:sp>
+      <p:sp>
+        <p:nvSpPr>
+          <p:cNvPr id="5" name="TextBox 4"/>
+          <p:cNvSpPr txBox="1"/>
+          <p:nvPr/>
+        </p:nvSpPr>
+        <p:spPr>
+          <a:xfrm>
+            <a:off x="640080" y="3753612"/>
+            <a:ext cx="10911535" cy="365760"/>
+          </a:xfrm>
+          <a:prstGeom prst="rect">
+            <a:avLst/>
+          </a:prstGeom>
+          <a:noFill/>
+        </p:spPr>
+        <p:txBody>
+          <a:bodyPr wrap="square">
+            <a:spAutoFit/>
+          </a:bodyPr>
+          <a:lstStyle/>
+          <a:p>
+            <a:pPr algn="ctr"/>
+            <a:r>
+              <a:rPr sz="2400" b="0" i="1">
+                <a:solidFill>
+                  <a:srgbClr val="AAAAAA"/>
+                </a:solidFill>
+                <a:latin typeface="Arial"/>
+              </a:rPr>
+              <a:t>Shunominade watashiwa shinjiyou</a:t>
+            </a:r>
+          </a:p>
+        </p:txBody>
+      </p:sp>
+      <p:sp>
+        <p:nvSpPr>
+          <p:cNvPr id="6" name="TextBox 5"/>
+          <p:cNvSpPr txBox="1"/>
+          <p:nvPr/>
+        </p:nvSpPr>
+        <p:spPr>
+          <a:xfrm>
+            <a:off x="640080" y="4530852"/>
+            <a:ext cx="10911535" cy="310896"/>
           </a:xfrm>
           <a:prstGeom prst="rect">
             <a:avLst/>
@@ -5088,81 +4738,11 @@
             <a:r>
               <a:rPr sz="2000" b="0" i="1">
                 <a:solidFill>
-                  <a:srgbClr val="8C8C8C"/>
-                </a:solidFill>
-                <a:latin typeface="Arial"/>
-              </a:rPr>
-              <a:t/>
-            </a:r>
-          </a:p>
-        </p:txBody>
-      </p:sp>
-      <p:sp>
-        <p:nvSpPr>
-          <p:cNvPr id="5" name="TextBox 4"/>
-          <p:cNvSpPr txBox="1"/>
-          <p:nvPr/>
-        </p:nvSpPr>
-        <p:spPr>
-          <a:xfrm>
-            <a:off x="594360" y="3529584"/>
-            <a:ext cx="11002975" cy="685800"/>
-          </a:xfrm>
-          <a:prstGeom prst="rect">
-            <a:avLst/>
-          </a:prstGeom>
-          <a:noFill/>
-        </p:spPr>
-        <p:txBody>
-          <a:bodyPr wrap="square">
-            <a:spAutoFit/>
-          </a:bodyPr>
-          <a:lstStyle/>
-          <a:p>
-            <a:pPr algn="ctr"/>
-            <a:r>
-              <a:rPr sz="4400" b="1" i="0">
-                <a:solidFill>
-                  <a:srgbClr val="FFFFFF"/>
-                </a:solidFill>
-                <a:latin typeface="Arial"/>
-              </a:rPr>
-              <a:t>主の御名で    私は        信じよう</a:t>
-            </a:r>
-          </a:p>
-        </p:txBody>
-      </p:sp>
-      <p:sp>
-        <p:nvSpPr>
-          <p:cNvPr id="6" name="TextBox 5"/>
-          <p:cNvSpPr txBox="1"/>
-          <p:nvPr/>
-        </p:nvSpPr>
-        <p:spPr>
-          <a:xfrm>
-            <a:off x="594360" y="4251960"/>
-            <a:ext cx="11002975" cy="384048"/>
-          </a:xfrm>
-          <a:prstGeom prst="rect">
-            <a:avLst/>
-          </a:prstGeom>
-          <a:noFill/>
-        </p:spPr>
-        <p:txBody>
-          <a:bodyPr wrap="square">
-            <a:spAutoFit/>
-          </a:bodyPr>
-          <a:lstStyle/>
-          <a:p>
-            <a:pPr algn="ctr"/>
-            <a:r>
-              <a:rPr sz="2400" b="0" i="1">
-                <a:solidFill>
-                  <a:srgbClr val="B4B4B4"/>
-                </a:solidFill>
-                <a:latin typeface="Arial"/>
-              </a:rPr>
-              <a:t>Shunominade watashiwa shinjiyou</a:t>
+                  <a:srgbClr val="828282"/>
+                </a:solidFill>
+                <a:latin typeface="Arial"/>
+              </a:rPr>
+              <a:t>Creio em Cristo, o Filho</a:t>
             </a:r>
           </a:p>
         </p:txBody>
@@ -5175,8 +4755,8 @@
         </p:nvSpPr>
         <p:spPr>
           <a:xfrm>
-            <a:off x="594360" y="4672584"/>
-            <a:ext cx="11002975" cy="347472"/>
+            <a:off x="640080" y="4896612"/>
+            <a:ext cx="10911535" cy="310896"/>
           </a:xfrm>
           <a:prstGeom prst="rect">
             <a:avLst/>
@@ -5193,11 +4773,11 @@
             <a:r>
               <a:rPr sz="2000" b="0" i="1">
                 <a:solidFill>
-                  <a:srgbClr val="8C8C8C"/>
-                </a:solidFill>
-                <a:latin typeface="Arial"/>
-              </a:rPr>
-              <a:t/>
+                  <a:srgbClr val="828282"/>
+                </a:solidFill>
+                <a:latin typeface="Arial"/>
+              </a:rPr>
+              <a:t>Creio no Espírito Santo</a:t>
             </a:r>
           </a:p>
         </p:txBody>
@@ -5236,23 +4816,23 @@
         </p:nvSpPr>
         <p:spPr>
           <a:xfrm>
-            <a:off x="594360" y="2258568"/>
-            <a:ext cx="11002975" cy="685800"/>
-          </a:xfrm>
-          <a:prstGeom prst="rect">
-            <a:avLst/>
-          </a:prstGeom>
-          <a:noFill/>
-        </p:spPr>
-        <p:txBody>
-          <a:bodyPr wrap="square">
-            <a:spAutoFit/>
-          </a:bodyPr>
-          <a:lstStyle/>
-          <a:p>
-            <a:pPr algn="ctr"/>
-            <a:r>
-              <a:rPr sz="4400" b="1" i="0">
+            <a:off x="640080" y="2052828"/>
+            <a:ext cx="10911535" cy="731520"/>
+          </a:xfrm>
+          <a:prstGeom prst="rect">
+            <a:avLst/>
+          </a:prstGeom>
+          <a:noFill/>
+        </p:spPr>
+        <p:txBody>
+          <a:bodyPr wrap="square">
+            <a:spAutoFit/>
+          </a:bodyPr>
+          <a:lstStyle/>
+          <a:p>
+            <a:pPr algn="ctr"/>
+            <a:r>
+              <a:rPr sz="4800" b="1" i="0">
                 <a:solidFill>
                   <a:srgbClr val="FFFFFF"/>
                 </a:solidFill>
@@ -5271,99 +4851,29 @@
         </p:nvSpPr>
         <p:spPr>
           <a:xfrm>
-            <a:off x="594360" y="2980944"/>
-            <a:ext cx="11002975" cy="347472"/>
-          </a:xfrm>
-          <a:prstGeom prst="rect">
-            <a:avLst/>
-          </a:prstGeom>
-          <a:noFill/>
-        </p:spPr>
-        <p:txBody>
-          <a:bodyPr wrap="square">
-            <a:spAutoFit/>
-          </a:bodyPr>
-          <a:lstStyle/>
-          <a:p>
-            <a:pPr algn="ctr"/>
-            <a:r>
-              <a:rPr sz="2200" b="0" i="1">
-                <a:solidFill>
-                  <a:srgbClr val="8C8C8C"/>
-                </a:solidFill>
-                <a:latin typeface="Arial"/>
-              </a:rPr>
-              <a:t/>
-            </a:r>
-          </a:p>
-        </p:txBody>
-      </p:sp>
-      <p:sp>
-        <p:nvSpPr>
-          <p:cNvPr id="4" name="TextBox 3"/>
-          <p:cNvSpPr txBox="1"/>
-          <p:nvPr/>
-        </p:nvSpPr>
-        <p:spPr>
-          <a:xfrm>
-            <a:off x="594360" y="3529584"/>
-            <a:ext cx="11002975" cy="685800"/>
-          </a:xfrm>
-          <a:prstGeom prst="rect">
-            <a:avLst/>
-          </a:prstGeom>
-          <a:noFill/>
-        </p:spPr>
-        <p:txBody>
-          <a:bodyPr wrap="square">
-            <a:spAutoFit/>
-          </a:bodyPr>
-          <a:lstStyle/>
-          <a:p>
-            <a:pPr algn="ctr"/>
-            <a:r>
-              <a:rPr sz="4400" b="1" i="0">
+            <a:off x="640080" y="2985516"/>
+            <a:ext cx="10911535" cy="731520"/>
+          </a:xfrm>
+          <a:prstGeom prst="rect">
+            <a:avLst/>
+          </a:prstGeom>
+          <a:noFill/>
+        </p:spPr>
+        <p:txBody>
+          <a:bodyPr wrap="square">
+            <a:spAutoFit/>
+          </a:bodyPr>
+          <a:lstStyle/>
+          <a:p>
+            <a:pPr algn="ctr"/>
+            <a:r>
+              <a:rPr sz="4800" b="1" i="0">
                 <a:solidFill>
                   <a:srgbClr val="FFFFFF"/>
                 </a:solidFill>
                 <a:latin typeface="Arial"/>
               </a:rPr>
               <a:t>Deus Todo-Poderoso</a:t>
-            </a:r>
-          </a:p>
-        </p:txBody>
-      </p:sp>
-      <p:sp>
-        <p:nvSpPr>
-          <p:cNvPr id="5" name="TextBox 4"/>
-          <p:cNvSpPr txBox="1"/>
-          <p:nvPr/>
-        </p:nvSpPr>
-        <p:spPr>
-          <a:xfrm>
-            <a:off x="594360" y="4251960"/>
-            <a:ext cx="11002975" cy="347472"/>
-          </a:xfrm>
-          <a:prstGeom prst="rect">
-            <a:avLst/>
-          </a:prstGeom>
-          <a:noFill/>
-        </p:spPr>
-        <p:txBody>
-          <a:bodyPr wrap="square">
-            <a:spAutoFit/>
-          </a:bodyPr>
-          <a:lstStyle/>
-          <a:p>
-            <a:pPr algn="ctr"/>
-            <a:r>
-              <a:rPr sz="2200" b="0" i="1">
-                <a:solidFill>
-                  <a:srgbClr val="8C8C8C"/>
-                </a:solidFill>
-                <a:latin typeface="Arial"/>
-              </a:rPr>
-              <a:t/>
             </a:r>
           </a:p>
         </p:txBody>
@@ -5402,23 +4912,23 @@
         </p:nvSpPr>
         <p:spPr>
           <a:xfrm>
-            <a:off x="594360" y="2258568"/>
-            <a:ext cx="11002975" cy="685800"/>
-          </a:xfrm>
-          <a:prstGeom prst="rect">
-            <a:avLst/>
-          </a:prstGeom>
-          <a:noFill/>
-        </p:spPr>
-        <p:txBody>
-          <a:bodyPr wrap="square">
-            <a:spAutoFit/>
-          </a:bodyPr>
-          <a:lstStyle/>
-          <a:p>
-            <a:pPr algn="ctr"/>
-            <a:r>
-              <a:rPr sz="4400" b="1" i="0">
+            <a:off x="640080" y="2052828"/>
+            <a:ext cx="10911535" cy="731520"/>
+          </a:xfrm>
+          <a:prstGeom prst="rect">
+            <a:avLst/>
+          </a:prstGeom>
+          <a:noFill/>
+        </p:spPr>
+        <p:txBody>
+          <a:bodyPr wrap="square">
+            <a:spAutoFit/>
+          </a:bodyPr>
+          <a:lstStyle/>
+          <a:p>
+            <a:pPr algn="ctr"/>
+            <a:r>
+              <a:rPr sz="4800" b="1" i="0">
                 <a:solidFill>
                   <a:srgbClr val="FFFFFF"/>
                 </a:solidFill>
@@ -5437,29 +4947,29 @@
         </p:nvSpPr>
         <p:spPr>
           <a:xfrm>
-            <a:off x="594360" y="2980944"/>
-            <a:ext cx="11002975" cy="347472"/>
-          </a:xfrm>
-          <a:prstGeom prst="rect">
-            <a:avLst/>
-          </a:prstGeom>
-          <a:noFill/>
-        </p:spPr>
-        <p:txBody>
-          <a:bodyPr wrap="square">
-            <a:spAutoFit/>
-          </a:bodyPr>
-          <a:lstStyle/>
-          <a:p>
-            <a:pPr algn="ctr"/>
-            <a:r>
-              <a:rPr sz="2200" b="0" i="1">
-                <a:solidFill>
-                  <a:srgbClr val="8C8C8C"/>
-                </a:solidFill>
-                <a:latin typeface="Arial"/>
-              </a:rPr>
-              <a:t/>
+            <a:off x="640080" y="2985516"/>
+            <a:ext cx="10911535" cy="731520"/>
+          </a:xfrm>
+          <a:prstGeom prst="rect">
+            <a:avLst/>
+          </a:prstGeom>
+          <a:noFill/>
+        </p:spPr>
+        <p:txBody>
+          <a:bodyPr wrap="square">
+            <a:spAutoFit/>
+          </a:bodyPr>
+          <a:lstStyle/>
+          <a:p>
+            <a:pPr algn="ctr"/>
+            <a:r>
+              <a:rPr sz="4800" b="1" i="0">
+                <a:solidFill>
+                  <a:srgbClr val="FFFFFF"/>
+                </a:solidFill>
+                <a:latin typeface="Arial"/>
+              </a:rPr>
+              <a:t>Creio em Deus, nosso Pai</a:t>
             </a:r>
           </a:p>
         </p:txBody>
@@ -5472,29 +4982,29 @@
         </p:nvSpPr>
         <p:spPr>
           <a:xfrm>
-            <a:off x="594360" y="3529584"/>
-            <a:ext cx="11002975" cy="685800"/>
-          </a:xfrm>
-          <a:prstGeom prst="rect">
-            <a:avLst/>
-          </a:prstGeom>
-          <a:noFill/>
-        </p:spPr>
-        <p:txBody>
-          <a:bodyPr wrap="square">
-            <a:spAutoFit/>
-          </a:bodyPr>
-          <a:lstStyle/>
-          <a:p>
-            <a:pPr algn="ctr"/>
-            <a:r>
-              <a:rPr sz="4400" b="1" i="0">
-                <a:solidFill>
-                  <a:srgbClr val="FFFFFF"/>
-                </a:solidFill>
-                <a:latin typeface="Arial"/>
-              </a:rPr>
-              <a:t>Creio em Deus, nosso Pai</a:t>
+            <a:off x="640080" y="4128516"/>
+            <a:ext cx="10911535" cy="310896"/>
+          </a:xfrm>
+          <a:prstGeom prst="rect">
+            <a:avLst/>
+          </a:prstGeom>
+          <a:noFill/>
+        </p:spPr>
+        <p:txBody>
+          <a:bodyPr wrap="square">
+            <a:spAutoFit/>
+          </a:bodyPr>
+          <a:lstStyle/>
+          <a:p>
+            <a:pPr algn="ctr"/>
+            <a:r>
+              <a:rPr sz="2000" b="0" i="0">
+                <a:solidFill>
+                  <a:srgbClr val="828282"/>
+                </a:solidFill>
+                <a:latin typeface="Arial"/>
+              </a:rPr>
+              <a:t>父なる我が    御神と       神の子   イエスと</a:t>
             </a:r>
           </a:p>
         </p:txBody>
@@ -5507,29 +5017,29 @@
         </p:nvSpPr>
         <p:spPr>
           <a:xfrm>
-            <a:off x="594360" y="4251960"/>
-            <a:ext cx="11002975" cy="347472"/>
-          </a:xfrm>
-          <a:prstGeom prst="rect">
-            <a:avLst/>
-          </a:prstGeom>
-          <a:noFill/>
-        </p:spPr>
-        <p:txBody>
-          <a:bodyPr wrap="square">
-            <a:spAutoFit/>
-          </a:bodyPr>
-          <a:lstStyle/>
-          <a:p>
-            <a:pPr algn="ctr"/>
-            <a:r>
-              <a:rPr sz="2200" b="0" i="1">
-                <a:solidFill>
-                  <a:srgbClr val="8C8C8C"/>
-                </a:solidFill>
-                <a:latin typeface="Arial"/>
-              </a:rPr>
-              <a:t/>
+            <a:off x="640080" y="4494276"/>
+            <a:ext cx="10911535" cy="310896"/>
+          </a:xfrm>
+          <a:prstGeom prst="rect">
+            <a:avLst/>
+          </a:prstGeom>
+          <a:noFill/>
+        </p:spPr>
+        <p:txBody>
+          <a:bodyPr wrap="square">
+            <a:spAutoFit/>
+          </a:bodyPr>
+          <a:lstStyle/>
+          <a:p>
+            <a:pPr algn="ctr"/>
+            <a:r>
+              <a:rPr sz="2000" b="0" i="0">
+                <a:solidFill>
+                  <a:srgbClr val="828282"/>
+                </a:solidFill>
+                <a:latin typeface="Arial"/>
+              </a:rPr>
+              <a:t>聖霊のこの三位を　     私は信じる</a:t>
             </a:r>
           </a:p>
         </p:txBody>
@@ -5568,23 +5078,23 @@
         </p:nvSpPr>
         <p:spPr>
           <a:xfrm>
-            <a:off x="594360" y="2258568"/>
-            <a:ext cx="11002975" cy="685800"/>
-          </a:xfrm>
-          <a:prstGeom prst="rect">
-            <a:avLst/>
-          </a:prstGeom>
-          <a:noFill/>
-        </p:spPr>
-        <p:txBody>
-          <a:bodyPr wrap="square">
-            <a:spAutoFit/>
-          </a:bodyPr>
-          <a:lstStyle/>
-          <a:p>
-            <a:pPr algn="ctr"/>
-            <a:r>
-              <a:rPr sz="4400" b="1" i="0">
+            <a:off x="640080" y="2052828"/>
+            <a:ext cx="10911535" cy="731520"/>
+          </a:xfrm>
+          <a:prstGeom prst="rect">
+            <a:avLst/>
+          </a:prstGeom>
+          <a:noFill/>
+        </p:spPr>
+        <p:txBody>
+          <a:bodyPr wrap="square">
+            <a:spAutoFit/>
+          </a:bodyPr>
+          <a:lstStyle/>
+          <a:p>
+            <a:pPr algn="ctr"/>
+            <a:r>
+              <a:rPr sz="4800" b="1" i="0">
                 <a:solidFill>
                   <a:srgbClr val="FFFFFF"/>
                 </a:solidFill>
@@ -5603,29 +5113,29 @@
         </p:nvSpPr>
         <p:spPr>
           <a:xfrm>
-            <a:off x="594360" y="2980944"/>
-            <a:ext cx="11002975" cy="347472"/>
-          </a:xfrm>
-          <a:prstGeom prst="rect">
-            <a:avLst/>
-          </a:prstGeom>
-          <a:noFill/>
-        </p:spPr>
-        <p:txBody>
-          <a:bodyPr wrap="square">
-            <a:spAutoFit/>
-          </a:bodyPr>
-          <a:lstStyle/>
-          <a:p>
-            <a:pPr algn="ctr"/>
-            <a:r>
-              <a:rPr sz="2200" b="0" i="1">
-                <a:solidFill>
-                  <a:srgbClr val="8C8C8C"/>
-                </a:solidFill>
-                <a:latin typeface="Arial"/>
-              </a:rPr>
-              <a:t/>
+            <a:off x="640080" y="2985516"/>
+            <a:ext cx="10911535" cy="731520"/>
+          </a:xfrm>
+          <a:prstGeom prst="rect">
+            <a:avLst/>
+          </a:prstGeom>
+          <a:noFill/>
+        </p:spPr>
+        <p:txBody>
+          <a:bodyPr wrap="square">
+            <a:spAutoFit/>
+          </a:bodyPr>
+          <a:lstStyle/>
+          <a:p>
+            <a:pPr algn="ctr"/>
+            <a:r>
+              <a:rPr sz="4800" b="1" i="0">
+                <a:solidFill>
+                  <a:srgbClr val="FFFFFF"/>
+                </a:solidFill>
+                <a:latin typeface="Arial"/>
+              </a:rPr>
+              <a:t>Creio no Espírito Santo</a:t>
             </a:r>
           </a:p>
         </p:txBody>
@@ -5638,29 +5148,29 @@
         </p:nvSpPr>
         <p:spPr>
           <a:xfrm>
-            <a:off x="594360" y="3529584"/>
-            <a:ext cx="11002975" cy="685800"/>
-          </a:xfrm>
-          <a:prstGeom prst="rect">
-            <a:avLst/>
-          </a:prstGeom>
-          <a:noFill/>
-        </p:spPr>
-        <p:txBody>
-          <a:bodyPr wrap="square">
-            <a:spAutoFit/>
-          </a:bodyPr>
-          <a:lstStyle/>
-          <a:p>
-            <a:pPr algn="ctr"/>
-            <a:r>
-              <a:rPr sz="4400" b="1" i="0">
-                <a:solidFill>
-                  <a:srgbClr val="FFFFFF"/>
-                </a:solidFill>
-                <a:latin typeface="Arial"/>
-              </a:rPr>
-              <a:t>Creio no Espírito Santo</a:t>
+            <a:off x="640080" y="4128516"/>
+            <a:ext cx="10911535" cy="310896"/>
+          </a:xfrm>
+          <a:prstGeom prst="rect">
+            <a:avLst/>
+          </a:prstGeom>
+          <a:noFill/>
+        </p:spPr>
+        <p:txBody>
+          <a:bodyPr wrap="square">
+            <a:spAutoFit/>
+          </a:bodyPr>
+          <a:lstStyle/>
+          <a:p>
+            <a:pPr algn="ctr"/>
+            <a:r>
+              <a:rPr sz="2000" b="0" i="0">
+                <a:solidFill>
+                  <a:srgbClr val="828282"/>
+                </a:solidFill>
+                <a:latin typeface="Arial"/>
+              </a:rPr>
+              <a:t>よみがえりの力で　   よみがえることを</a:t>
             </a:r>
           </a:p>
         </p:txBody>
@@ -5673,29 +5183,29 @@
         </p:nvSpPr>
         <p:spPr>
           <a:xfrm>
-            <a:off x="594360" y="4251960"/>
-            <a:ext cx="11002975" cy="347472"/>
-          </a:xfrm>
-          <a:prstGeom prst="rect">
-            <a:avLst/>
-          </a:prstGeom>
-          <a:noFill/>
-        </p:spPr>
-        <p:txBody>
-          <a:bodyPr wrap="square">
-            <a:spAutoFit/>
-          </a:bodyPr>
-          <a:lstStyle/>
-          <a:p>
-            <a:pPr algn="ctr"/>
-            <a:r>
-              <a:rPr sz="2200" b="0" i="1">
-                <a:solidFill>
-                  <a:srgbClr val="8C8C8C"/>
-                </a:solidFill>
-                <a:latin typeface="Arial"/>
-              </a:rPr>
-              <a:t/>
+            <a:off x="640080" y="4494276"/>
+            <a:ext cx="10911535" cy="310896"/>
+          </a:xfrm>
+          <a:prstGeom prst="rect">
+            <a:avLst/>
+          </a:prstGeom>
+          <a:noFill/>
+        </p:spPr>
+        <p:txBody>
+          <a:bodyPr wrap="square">
+            <a:spAutoFit/>
+          </a:bodyPr>
+          <a:lstStyle/>
+          <a:p>
+            <a:pPr algn="ctr"/>
+            <a:r>
+              <a:rPr sz="2000" b="0" i="0">
+                <a:solidFill>
+                  <a:srgbClr val="828282"/>
+                </a:solidFill>
+                <a:latin typeface="Arial"/>
+              </a:rPr>
+              <a:t>主の御名で    私は        信じよう</a:t>
             </a:r>
           </a:p>
         </p:txBody>
@@ -5734,23 +5244,23 @@
         </p:nvSpPr>
         <p:spPr>
           <a:xfrm>
-            <a:off x="594360" y="2258568"/>
-            <a:ext cx="11002975" cy="685800"/>
-          </a:xfrm>
-          <a:prstGeom prst="rect">
-            <a:avLst/>
-          </a:prstGeom>
-          <a:noFill/>
-        </p:spPr>
-        <p:txBody>
-          <a:bodyPr wrap="square">
-            <a:spAutoFit/>
-          </a:bodyPr>
-          <a:lstStyle/>
-          <a:p>
-            <a:pPr algn="ctr"/>
-            <a:r>
-              <a:rPr sz="4400" b="1" i="0">
+            <a:off x="640080" y="2052828"/>
+            <a:ext cx="10911535" cy="731520"/>
+          </a:xfrm>
+          <a:prstGeom prst="rect">
+            <a:avLst/>
+          </a:prstGeom>
+          <a:noFill/>
+        </p:spPr>
+        <p:txBody>
+          <a:bodyPr wrap="square">
+            <a:spAutoFit/>
+          </a:bodyPr>
+          <a:lstStyle/>
+          <a:p>
+            <a:pPr algn="ctr"/>
+            <a:r>
+              <a:rPr sz="4800" b="1" i="0">
                 <a:solidFill>
                   <a:srgbClr val="FFFFFF"/>
                 </a:solidFill>
@@ -5769,29 +5279,29 @@
         </p:nvSpPr>
         <p:spPr>
           <a:xfrm>
-            <a:off x="594360" y="2980944"/>
-            <a:ext cx="11002975" cy="347472"/>
-          </a:xfrm>
-          <a:prstGeom prst="rect">
-            <a:avLst/>
-          </a:prstGeom>
-          <a:noFill/>
-        </p:spPr>
-        <p:txBody>
-          <a:bodyPr wrap="square">
-            <a:spAutoFit/>
-          </a:bodyPr>
-          <a:lstStyle/>
-          <a:p>
-            <a:pPr algn="ctr"/>
-            <a:r>
-              <a:rPr sz="2200" b="0" i="1">
-                <a:solidFill>
-                  <a:srgbClr val="8C8C8C"/>
-                </a:solidFill>
-                <a:latin typeface="Arial"/>
-              </a:rPr>
-              <a:t/>
+            <a:off x="640080" y="2985516"/>
+            <a:ext cx="10911535" cy="731520"/>
+          </a:xfrm>
+          <a:prstGeom prst="rect">
+            <a:avLst/>
+          </a:prstGeom>
+          <a:noFill/>
+        </p:spPr>
+        <p:txBody>
+          <a:bodyPr wrap="square">
+            <a:spAutoFit/>
+          </a:bodyPr>
+          <a:lstStyle/>
+          <a:p>
+            <a:pPr algn="ctr"/>
+            <a:r>
+              <a:rPr sz="4800" b="1" i="0">
+                <a:solidFill>
+                  <a:srgbClr val="FFFFFF"/>
+                </a:solidFill>
+                <a:latin typeface="Arial"/>
+              </a:rPr>
+              <a:t>Creio na ressurreição</a:t>
             </a:r>
           </a:p>
         </p:txBody>
@@ -5804,29 +5314,29 @@
         </p:nvSpPr>
         <p:spPr>
           <a:xfrm>
-            <a:off x="594360" y="3529584"/>
-            <a:ext cx="11002975" cy="685800"/>
-          </a:xfrm>
-          <a:prstGeom prst="rect">
-            <a:avLst/>
-          </a:prstGeom>
-          <a:noFill/>
-        </p:spPr>
-        <p:txBody>
-          <a:bodyPr wrap="square">
-            <a:spAutoFit/>
-          </a:bodyPr>
-          <a:lstStyle/>
-          <a:p>
-            <a:pPr algn="ctr"/>
-            <a:r>
-              <a:rPr sz="4400" b="1" i="0">
-                <a:solidFill>
-                  <a:srgbClr val="FFFFFF"/>
-                </a:solidFill>
-                <a:latin typeface="Arial"/>
-              </a:rPr>
-              <a:t>Creio na ressurreição</a:t>
+            <a:off x="640080" y="4128516"/>
+            <a:ext cx="10911535" cy="310896"/>
+          </a:xfrm>
+          <a:prstGeom prst="rect">
+            <a:avLst/>
+          </a:prstGeom>
+          <a:noFill/>
+        </p:spPr>
+        <p:txBody>
+          <a:bodyPr wrap="square">
+            <a:spAutoFit/>
+          </a:bodyPr>
+          <a:lstStyle/>
+          <a:p>
+            <a:pPr algn="ctr"/>
+            <a:r>
+              <a:rPr sz="2000" b="0" i="0">
+                <a:solidFill>
+                  <a:srgbClr val="828282"/>
+                </a:solidFill>
+                <a:latin typeface="Arial"/>
+              </a:rPr>
+              <a:t>父なる我が    御神と       神の子   イエスと</a:t>
             </a:r>
           </a:p>
         </p:txBody>
@@ -5839,29 +5349,29 @@
         </p:nvSpPr>
         <p:spPr>
           <a:xfrm>
-            <a:off x="594360" y="4251960"/>
-            <a:ext cx="11002975" cy="347472"/>
-          </a:xfrm>
-          <a:prstGeom prst="rect">
-            <a:avLst/>
-          </a:prstGeom>
-          <a:noFill/>
-        </p:spPr>
-        <p:txBody>
-          <a:bodyPr wrap="square">
-            <a:spAutoFit/>
-          </a:bodyPr>
-          <a:lstStyle/>
-          <a:p>
-            <a:pPr algn="ctr"/>
-            <a:r>
-              <a:rPr sz="2200" b="0" i="1">
-                <a:solidFill>
-                  <a:srgbClr val="8C8C8C"/>
-                </a:solidFill>
-                <a:latin typeface="Arial"/>
-              </a:rPr>
-              <a:t/>
+            <a:off x="640080" y="4494276"/>
+            <a:ext cx="10911535" cy="310896"/>
+          </a:xfrm>
+          <a:prstGeom prst="rect">
+            <a:avLst/>
+          </a:prstGeom>
+          <a:noFill/>
+        </p:spPr>
+        <p:txBody>
+          <a:bodyPr wrap="square">
+            <a:spAutoFit/>
+          </a:bodyPr>
+          <a:lstStyle/>
+          <a:p>
+            <a:pPr algn="ctr"/>
+            <a:r>
+              <a:rPr sz="2000" b="0" i="0">
+                <a:solidFill>
+                  <a:srgbClr val="828282"/>
+                </a:solidFill>
+                <a:latin typeface="Arial"/>
+              </a:rPr>
+              <a:t>聖霊のこの三位を　     私は信じる</a:t>
             </a:r>
           </a:p>
         </p:txBody>
@@ -5900,23 +5410,23 @@
         </p:nvSpPr>
         <p:spPr>
           <a:xfrm>
-            <a:off x="594360" y="2258568"/>
-            <a:ext cx="11002975" cy="685800"/>
-          </a:xfrm>
-          <a:prstGeom prst="rect">
-            <a:avLst/>
-          </a:prstGeom>
-          <a:noFill/>
-        </p:spPr>
-        <p:txBody>
-          <a:bodyPr wrap="square">
-            <a:spAutoFit/>
-          </a:bodyPr>
-          <a:lstStyle/>
-          <a:p>
-            <a:pPr algn="ctr"/>
-            <a:r>
-              <a:rPr sz="4400" b="1" i="0">
+            <a:off x="640080" y="2052828"/>
+            <a:ext cx="10911535" cy="731520"/>
+          </a:xfrm>
+          <a:prstGeom prst="rect">
+            <a:avLst/>
+          </a:prstGeom>
+          <a:noFill/>
+        </p:spPr>
+        <p:txBody>
+          <a:bodyPr wrap="square">
+            <a:spAutoFit/>
+          </a:bodyPr>
+          <a:lstStyle/>
+          <a:p>
+            <a:pPr algn="ctr"/>
+            <a:r>
+              <a:rPr sz="4800" b="1" i="0">
                 <a:solidFill>
                   <a:srgbClr val="FFFFFF"/>
                 </a:solidFill>
@@ -5935,29 +5445,29 @@
         </p:nvSpPr>
         <p:spPr>
           <a:xfrm>
-            <a:off x="594360" y="2980944"/>
-            <a:ext cx="11002975" cy="347472"/>
-          </a:xfrm>
-          <a:prstGeom prst="rect">
-            <a:avLst/>
-          </a:prstGeom>
-          <a:noFill/>
-        </p:spPr>
-        <p:txBody>
-          <a:bodyPr wrap="square">
-            <a:spAutoFit/>
-          </a:bodyPr>
-          <a:lstStyle/>
-          <a:p>
-            <a:pPr algn="ctr"/>
-            <a:r>
-              <a:rPr sz="2200" b="0" i="1">
-                <a:solidFill>
-                  <a:srgbClr val="8C8C8C"/>
-                </a:solidFill>
-                <a:latin typeface="Arial"/>
-              </a:rPr>
-              <a:t/>
+            <a:off x="640080" y="2985516"/>
+            <a:ext cx="10911535" cy="731520"/>
+          </a:xfrm>
+          <a:prstGeom prst="rect">
+            <a:avLst/>
+          </a:prstGeom>
+          <a:noFill/>
+        </p:spPr>
+        <p:txBody>
+          <a:bodyPr wrap="square">
+            <a:spAutoFit/>
+          </a:bodyPr>
+          <a:lstStyle/>
+          <a:p>
+            <a:pPr algn="ctr"/>
+            <a:r>
+              <a:rPr sz="4800" b="1" i="0">
+                <a:solidFill>
+                  <a:srgbClr val="FFFFFF"/>
+                </a:solidFill>
+                <a:latin typeface="Arial"/>
+              </a:rPr>
+              <a:t>O perdão está em Ti</a:t>
             </a:r>
           </a:p>
         </p:txBody>
@@ -5970,29 +5480,29 @@
         </p:nvSpPr>
         <p:spPr>
           <a:xfrm>
-            <a:off x="594360" y="3529584"/>
-            <a:ext cx="11002975" cy="685800"/>
-          </a:xfrm>
-          <a:prstGeom prst="rect">
-            <a:avLst/>
-          </a:prstGeom>
-          <a:noFill/>
-        </p:spPr>
-        <p:txBody>
-          <a:bodyPr wrap="square">
-            <a:spAutoFit/>
-          </a:bodyPr>
-          <a:lstStyle/>
-          <a:p>
-            <a:pPr algn="ctr"/>
-            <a:r>
-              <a:rPr sz="4400" b="1" i="0">
-                <a:solidFill>
-                  <a:srgbClr val="FFFFFF"/>
-                </a:solidFill>
-                <a:latin typeface="Arial"/>
-              </a:rPr>
-              <a:t>O perdão está em Ti</a:t>
+            <a:off x="640080" y="4128516"/>
+            <a:ext cx="10911535" cy="310896"/>
+          </a:xfrm>
+          <a:prstGeom prst="rect">
+            <a:avLst/>
+          </a:prstGeom>
+          <a:noFill/>
+        </p:spPr>
+        <p:txBody>
+          <a:bodyPr wrap="square">
+            <a:spAutoFit/>
+          </a:bodyPr>
+          <a:lstStyle/>
+          <a:p>
+            <a:pPr algn="ctr"/>
+            <a:r>
+              <a:rPr sz="2000" b="0" i="0">
+                <a:solidFill>
+                  <a:srgbClr val="828282"/>
+                </a:solidFill>
+                <a:latin typeface="Arial"/>
+              </a:rPr>
+              <a:t>よみがえりの力で　   よみがえることを</a:t>
             </a:r>
           </a:p>
         </p:txBody>
@@ -6005,29 +5515,29 @@
         </p:nvSpPr>
         <p:spPr>
           <a:xfrm>
-            <a:off x="594360" y="4251960"/>
-            <a:ext cx="11002975" cy="347472"/>
-          </a:xfrm>
-          <a:prstGeom prst="rect">
-            <a:avLst/>
-          </a:prstGeom>
-          <a:noFill/>
-        </p:spPr>
-        <p:txBody>
-          <a:bodyPr wrap="square">
-            <a:spAutoFit/>
-          </a:bodyPr>
-          <a:lstStyle/>
-          <a:p>
-            <a:pPr algn="ctr"/>
-            <a:r>
-              <a:rPr sz="2200" b="0" i="1">
-                <a:solidFill>
-                  <a:srgbClr val="8C8C8C"/>
-                </a:solidFill>
-                <a:latin typeface="Arial"/>
-              </a:rPr>
-              <a:t/>
+            <a:off x="640080" y="4494276"/>
+            <a:ext cx="10911535" cy="310896"/>
+          </a:xfrm>
+          <a:prstGeom prst="rect">
+            <a:avLst/>
+          </a:prstGeom>
+          <a:noFill/>
+        </p:spPr>
+        <p:txBody>
+          <a:bodyPr wrap="square">
+            <a:spAutoFit/>
+          </a:bodyPr>
+          <a:lstStyle/>
+          <a:p>
+            <a:pPr algn="ctr"/>
+            <a:r>
+              <a:rPr sz="2000" b="0" i="0">
+                <a:solidFill>
+                  <a:srgbClr val="828282"/>
+                </a:solidFill>
+                <a:latin typeface="Arial"/>
+              </a:rPr>
+              <a:t>主の御名で    私は        信じよう</a:t>
             </a:r>
           </a:p>
         </p:txBody>
@@ -6066,23 +5576,23 @@
         </p:nvSpPr>
         <p:spPr>
           <a:xfrm>
-            <a:off x="594360" y="2258568"/>
-            <a:ext cx="11002975" cy="685800"/>
-          </a:xfrm>
-          <a:prstGeom prst="rect">
-            <a:avLst/>
-          </a:prstGeom>
-          <a:noFill/>
-        </p:spPr>
-        <p:txBody>
-          <a:bodyPr wrap="square">
-            <a:spAutoFit/>
-          </a:bodyPr>
-          <a:lstStyle/>
-          <a:p>
-            <a:pPr algn="ctr"/>
-            <a:r>
-              <a:rPr sz="4400" b="1" i="0">
+            <a:off x="640080" y="2052828"/>
+            <a:ext cx="10911535" cy="731520"/>
+          </a:xfrm>
+          <a:prstGeom prst="rect">
+            <a:avLst/>
+          </a:prstGeom>
+          <a:noFill/>
+        </p:spPr>
+        <p:txBody>
+          <a:bodyPr wrap="square">
+            <a:spAutoFit/>
+          </a:bodyPr>
+          <a:lstStyle/>
+          <a:p>
+            <a:pPr algn="ctr"/>
+            <a:r>
+              <a:rPr sz="4800" b="1" i="0">
                 <a:solidFill>
                   <a:srgbClr val="FFFFFF"/>
                 </a:solidFill>
@@ -6101,99 +5611,29 @@
         </p:nvSpPr>
         <p:spPr>
           <a:xfrm>
-            <a:off x="594360" y="2980944"/>
-            <a:ext cx="11002975" cy="347472"/>
-          </a:xfrm>
-          <a:prstGeom prst="rect">
-            <a:avLst/>
-          </a:prstGeom>
-          <a:noFill/>
-        </p:spPr>
-        <p:txBody>
-          <a:bodyPr wrap="square">
-            <a:spAutoFit/>
-          </a:bodyPr>
-          <a:lstStyle/>
-          <a:p>
-            <a:pPr algn="ctr"/>
-            <a:r>
-              <a:rPr sz="2200" b="0" i="1">
-                <a:solidFill>
-                  <a:srgbClr val="8C8C8C"/>
-                </a:solidFill>
-                <a:latin typeface="Arial"/>
-              </a:rPr>
-              <a:t/>
-            </a:r>
-          </a:p>
-        </p:txBody>
-      </p:sp>
-      <p:sp>
-        <p:nvSpPr>
-          <p:cNvPr id="4" name="TextBox 3"/>
-          <p:cNvSpPr txBox="1"/>
-          <p:nvPr/>
-        </p:nvSpPr>
-        <p:spPr>
-          <a:xfrm>
-            <a:off x="594360" y="3529584"/>
-            <a:ext cx="11002975" cy="685800"/>
-          </a:xfrm>
-          <a:prstGeom prst="rect">
-            <a:avLst/>
-          </a:prstGeom>
-          <a:noFill/>
-        </p:spPr>
-        <p:txBody>
-          <a:bodyPr wrap="square">
-            <a:spAutoFit/>
-          </a:bodyPr>
-          <a:lstStyle/>
-          <a:p>
-            <a:pPr algn="ctr"/>
-            <a:r>
-              <a:rPr sz="4400" b="1" i="0">
+            <a:off x="640080" y="2985516"/>
+            <a:ext cx="10911535" cy="731520"/>
+          </a:xfrm>
+          <a:prstGeom prst="rect">
+            <a:avLst/>
+          </a:prstGeom>
+          <a:noFill/>
+        </p:spPr>
+        <p:txBody>
+          <a:bodyPr wrap="square">
+            <a:spAutoFit/>
+          </a:bodyPr>
+          <a:lstStyle/>
+          <a:p>
+            <a:pPr algn="ctr"/>
+            <a:r>
+              <a:rPr sz="4800" b="1" i="0">
                 <a:solidFill>
                   <a:srgbClr val="FFFFFF"/>
                 </a:solidFill>
                 <a:latin typeface="Arial"/>
               </a:rPr>
               <a:t>Ressurgiu em gloriosa vida</a:t>
-            </a:r>
-          </a:p>
-        </p:txBody>
-      </p:sp>
-      <p:sp>
-        <p:nvSpPr>
-          <p:cNvPr id="5" name="TextBox 4"/>
-          <p:cNvSpPr txBox="1"/>
-          <p:nvPr/>
-        </p:nvSpPr>
-        <p:spPr>
-          <a:xfrm>
-            <a:off x="594360" y="4251960"/>
-            <a:ext cx="11002975" cy="347472"/>
-          </a:xfrm>
-          <a:prstGeom prst="rect">
-            <a:avLst/>
-          </a:prstGeom>
-          <a:noFill/>
-        </p:spPr>
-        <p:txBody>
-          <a:bodyPr wrap="square">
-            <a:spAutoFit/>
-          </a:bodyPr>
-          <a:lstStyle/>
-          <a:p>
-            <a:pPr algn="ctr"/>
-            <a:r>
-              <a:rPr sz="2200" b="0" i="1">
-                <a:solidFill>
-                  <a:srgbClr val="8C8C8C"/>
-                </a:solidFill>
-                <a:latin typeface="Arial"/>
-              </a:rPr>
-              <a:t/>
             </a:r>
           </a:p>
         </p:txBody>
@@ -6232,23 +5672,23 @@
         </p:nvSpPr>
         <p:spPr>
           <a:xfrm>
-            <a:off x="594360" y="2258568"/>
-            <a:ext cx="11002975" cy="685800"/>
-          </a:xfrm>
-          <a:prstGeom prst="rect">
-            <a:avLst/>
-          </a:prstGeom>
-          <a:noFill/>
-        </p:spPr>
-        <p:txBody>
-          <a:bodyPr wrap="square">
-            <a:spAutoFit/>
-          </a:bodyPr>
-          <a:lstStyle/>
-          <a:p>
-            <a:pPr algn="ctr"/>
-            <a:r>
-              <a:rPr sz="4400" b="1" i="0">
+            <a:off x="640080" y="2052828"/>
+            <a:ext cx="10911535" cy="731520"/>
+          </a:xfrm>
+          <a:prstGeom prst="rect">
+            <a:avLst/>
+          </a:prstGeom>
+          <a:noFill/>
+        </p:spPr>
+        <p:txBody>
+          <a:bodyPr wrap="square">
+            <a:spAutoFit/>
+          </a:bodyPr>
+          <a:lstStyle/>
+          <a:p>
+            <a:pPr algn="ctr"/>
+            <a:r>
+              <a:rPr sz="4800" b="1" i="0">
                 <a:solidFill>
                   <a:srgbClr val="FFFFFF"/>
                 </a:solidFill>
@@ -6267,99 +5707,29 @@
         </p:nvSpPr>
         <p:spPr>
           <a:xfrm>
-            <a:off x="594360" y="2980944"/>
-            <a:ext cx="11002975" cy="347472"/>
-          </a:xfrm>
-          <a:prstGeom prst="rect">
-            <a:avLst/>
-          </a:prstGeom>
-          <a:noFill/>
-        </p:spPr>
-        <p:txBody>
-          <a:bodyPr wrap="square">
-            <a:spAutoFit/>
-          </a:bodyPr>
-          <a:lstStyle/>
-          <a:p>
-            <a:pPr algn="ctr"/>
-            <a:r>
-              <a:rPr sz="2200" b="0" i="1">
-                <a:solidFill>
-                  <a:srgbClr val="8C8C8C"/>
-                </a:solidFill>
-                <a:latin typeface="Arial"/>
-              </a:rPr>
-              <a:t/>
-            </a:r>
-          </a:p>
-        </p:txBody>
-      </p:sp>
-      <p:sp>
-        <p:nvSpPr>
-          <p:cNvPr id="4" name="TextBox 3"/>
-          <p:cNvSpPr txBox="1"/>
-          <p:nvPr/>
-        </p:nvSpPr>
-        <p:spPr>
-          <a:xfrm>
-            <a:off x="594360" y="3529584"/>
-            <a:ext cx="11002975" cy="685800"/>
-          </a:xfrm>
-          <a:prstGeom prst="rect">
-            <a:avLst/>
-          </a:prstGeom>
-          <a:noFill/>
-        </p:spPr>
-        <p:txBody>
-          <a:bodyPr wrap="square">
-            <a:spAutoFit/>
-          </a:bodyPr>
-          <a:lstStyle/>
-          <a:p>
-            <a:pPr algn="ctr"/>
-            <a:r>
-              <a:rPr sz="4400" b="1" i="0">
+            <a:off x="640080" y="2985516"/>
+            <a:ext cx="10911535" cy="731520"/>
+          </a:xfrm>
+          <a:prstGeom prst="rect">
+            <a:avLst/>
+          </a:prstGeom>
+          <a:noFill/>
+        </p:spPr>
+        <p:txBody>
+          <a:bodyPr wrap="square">
+            <a:spAutoFit/>
+          </a:bodyPr>
+          <a:lstStyle/>
+          <a:p>
+            <a:pPr algn="ctr"/>
+            <a:r>
+              <a:rPr sz="4800" b="1" i="0">
                 <a:solidFill>
                   <a:srgbClr val="FFFFFF"/>
                 </a:solidFill>
                 <a:latin typeface="Arial"/>
               </a:rPr>
               <a:t>E retornará para reinar</a:t>
-            </a:r>
-          </a:p>
-        </p:txBody>
-      </p:sp>
-      <p:sp>
-        <p:nvSpPr>
-          <p:cNvPr id="5" name="TextBox 4"/>
-          <p:cNvSpPr txBox="1"/>
-          <p:nvPr/>
-        </p:nvSpPr>
-        <p:spPr>
-          <a:xfrm>
-            <a:off x="594360" y="4251960"/>
-            <a:ext cx="11002975" cy="347472"/>
-          </a:xfrm>
-          <a:prstGeom prst="rect">
-            <a:avLst/>
-          </a:prstGeom>
-          <a:noFill/>
-        </p:spPr>
-        <p:txBody>
-          <a:bodyPr wrap="square">
-            <a:spAutoFit/>
-          </a:bodyPr>
-          <a:lstStyle/>
-          <a:p>
-            <a:pPr algn="ctr"/>
-            <a:r>
-              <a:rPr sz="2200" b="0" i="1">
-                <a:solidFill>
-                  <a:srgbClr val="8C8C8C"/>
-                </a:solidFill>
-                <a:latin typeface="Arial"/>
-              </a:rPr>
-              <a:t/>
             </a:r>
           </a:p>
         </p:txBody>
@@ -6398,23 +5768,23 @@
         </p:nvSpPr>
         <p:spPr>
           <a:xfrm>
-            <a:off x="594360" y="2258568"/>
-            <a:ext cx="11002975" cy="685800"/>
-          </a:xfrm>
-          <a:prstGeom prst="rect">
-            <a:avLst/>
-          </a:prstGeom>
-          <a:noFill/>
-        </p:spPr>
-        <p:txBody>
-          <a:bodyPr wrap="square">
-            <a:spAutoFit/>
-          </a:bodyPr>
-          <a:lstStyle/>
-          <a:p>
-            <a:pPr algn="ctr"/>
-            <a:r>
-              <a:rPr sz="4400" b="1" i="0">
+            <a:off x="640080" y="2052828"/>
+            <a:ext cx="10911535" cy="731520"/>
+          </a:xfrm>
+          <a:prstGeom prst="rect">
+            <a:avLst/>
+          </a:prstGeom>
+          <a:noFill/>
+        </p:spPr>
+        <p:txBody>
+          <a:bodyPr wrap="square">
+            <a:spAutoFit/>
+          </a:bodyPr>
+          <a:lstStyle/>
+          <a:p>
+            <a:pPr algn="ctr"/>
+            <a:r>
+              <a:rPr sz="4800" b="1" i="0">
                 <a:solidFill>
                   <a:srgbClr val="FFFFFF"/>
                 </a:solidFill>
@@ -6433,99 +5803,29 @@
         </p:nvSpPr>
         <p:spPr>
           <a:xfrm>
-            <a:off x="594360" y="2980944"/>
-            <a:ext cx="11002975" cy="347472"/>
-          </a:xfrm>
-          <a:prstGeom prst="rect">
-            <a:avLst/>
-          </a:prstGeom>
-          <a:noFill/>
-        </p:spPr>
-        <p:txBody>
-          <a:bodyPr wrap="square">
-            <a:spAutoFit/>
-          </a:bodyPr>
-          <a:lstStyle/>
-          <a:p>
-            <a:pPr algn="ctr"/>
-            <a:r>
-              <a:rPr sz="2200" b="0" i="1">
-                <a:solidFill>
-                  <a:srgbClr val="8C8C8C"/>
-                </a:solidFill>
-                <a:latin typeface="Arial"/>
-              </a:rPr>
-              <a:t/>
-            </a:r>
-          </a:p>
-        </p:txBody>
-      </p:sp>
-      <p:sp>
-        <p:nvSpPr>
-          <p:cNvPr id="4" name="TextBox 3"/>
-          <p:cNvSpPr txBox="1"/>
-          <p:nvPr/>
-        </p:nvSpPr>
-        <p:spPr>
-          <a:xfrm>
-            <a:off x="594360" y="3529584"/>
-            <a:ext cx="11002975" cy="685800"/>
-          </a:xfrm>
-          <a:prstGeom prst="rect">
-            <a:avLst/>
-          </a:prstGeom>
-          <a:noFill/>
-        </p:spPr>
-        <p:txBody>
-          <a:bodyPr wrap="square">
-            <a:spAutoFit/>
-          </a:bodyPr>
-          <a:lstStyle/>
-          <a:p>
-            <a:pPr algn="ctr"/>
-            <a:r>
-              <a:rPr sz="4400" b="1" i="0">
+            <a:off x="640080" y="2985516"/>
+            <a:ext cx="10911535" cy="731520"/>
+          </a:xfrm>
+          <a:prstGeom prst="rect">
+            <a:avLst/>
+          </a:prstGeom>
+          <a:noFill/>
+        </p:spPr>
+        <p:txBody>
+          <a:bodyPr wrap="square">
+            <a:spAutoFit/>
+          </a:bodyPr>
+          <a:lstStyle/>
+          <a:p>
+            <a:pPr algn="ctr"/>
+            <a:r>
+              <a:rPr sz="4800" b="1" i="0">
                 <a:solidFill>
                   <a:srgbClr val="FFFFFF"/>
                 </a:solidFill>
                 <a:latin typeface="Arial"/>
               </a:rPr>
               <a:t>Creio em Cristo, o Filho</a:t>
-            </a:r>
-          </a:p>
-        </p:txBody>
-      </p:sp>
-      <p:sp>
-        <p:nvSpPr>
-          <p:cNvPr id="5" name="TextBox 4"/>
-          <p:cNvSpPr txBox="1"/>
-          <p:nvPr/>
-        </p:nvSpPr>
-        <p:spPr>
-          <a:xfrm>
-            <a:off x="594360" y="4251960"/>
-            <a:ext cx="11002975" cy="347472"/>
-          </a:xfrm>
-          <a:prstGeom prst="rect">
-            <a:avLst/>
-          </a:prstGeom>
-          <a:noFill/>
-        </p:spPr>
-        <p:txBody>
-          <a:bodyPr wrap="square">
-            <a:spAutoFit/>
-          </a:bodyPr>
-          <a:lstStyle/>
-          <a:p>
-            <a:pPr algn="ctr"/>
-            <a:r>
-              <a:rPr sz="2200" b="0" i="1">
-                <a:solidFill>
-                  <a:srgbClr val="8C8C8C"/>
-                </a:solidFill>
-                <a:latin typeface="Arial"/>
-              </a:rPr>
-              <a:t/>
             </a:r>
           </a:p>
         </p:txBody>
@@ -6564,64 +5864,29 @@
         </p:nvSpPr>
         <p:spPr>
           <a:xfrm>
-            <a:off x="594360" y="2894076"/>
-            <a:ext cx="11002975" cy="685800"/>
-          </a:xfrm>
-          <a:prstGeom prst="rect">
-            <a:avLst/>
-          </a:prstGeom>
-          <a:noFill/>
-        </p:spPr>
-        <p:txBody>
-          <a:bodyPr wrap="square">
-            <a:spAutoFit/>
-          </a:bodyPr>
-          <a:lstStyle/>
-          <a:p>
-            <a:pPr algn="ctr"/>
-            <a:r>
-              <a:rPr sz="4400" b="1" i="0">
+            <a:off x="640080" y="2702052"/>
+            <a:ext cx="10911535" cy="731520"/>
+          </a:xfrm>
+          <a:prstGeom prst="rect">
+            <a:avLst/>
+          </a:prstGeom>
+          <a:noFill/>
+        </p:spPr>
+        <p:txBody>
+          <a:bodyPr wrap="square">
+            <a:spAutoFit/>
+          </a:bodyPr>
+          <a:lstStyle/>
+          <a:p>
+            <a:pPr algn="ctr"/>
+            <a:r>
+              <a:rPr sz="4800" b="1" i="0">
                 <a:solidFill>
                   <a:srgbClr val="FFFFFF"/>
                 </a:solidFill>
                 <a:latin typeface="Arial"/>
               </a:rPr>
               <a:t>Creio no Espírito Santo</a:t>
-            </a:r>
-          </a:p>
-        </p:txBody>
-      </p:sp>
-      <p:sp>
-        <p:nvSpPr>
-          <p:cNvPr id="3" name="TextBox 2"/>
-          <p:cNvSpPr txBox="1"/>
-          <p:nvPr/>
-        </p:nvSpPr>
-        <p:spPr>
-          <a:xfrm>
-            <a:off x="594360" y="3616452"/>
-            <a:ext cx="11002975" cy="347472"/>
-          </a:xfrm>
-          <a:prstGeom prst="rect">
-            <a:avLst/>
-          </a:prstGeom>
-          <a:noFill/>
-        </p:spPr>
-        <p:txBody>
-          <a:bodyPr wrap="square">
-            <a:spAutoFit/>
-          </a:bodyPr>
-          <a:lstStyle/>
-          <a:p>
-            <a:pPr algn="ctr"/>
-            <a:r>
-              <a:rPr sz="2200" b="0" i="1">
-                <a:solidFill>
-                  <a:srgbClr val="8C8C8C"/>
-                </a:solidFill>
-                <a:latin typeface="Arial"/>
-              </a:rPr>
-              <a:t/>
             </a:r>
           </a:p>
         </p:txBody>
@@ -6660,23 +5925,23 @@
         </p:nvSpPr>
         <p:spPr>
           <a:xfrm>
-            <a:off x="594360" y="2258568"/>
-            <a:ext cx="11002975" cy="685800"/>
-          </a:xfrm>
-          <a:prstGeom prst="rect">
-            <a:avLst/>
-          </a:prstGeom>
-          <a:noFill/>
-        </p:spPr>
-        <p:txBody>
-          <a:bodyPr wrap="square">
-            <a:spAutoFit/>
-          </a:bodyPr>
-          <a:lstStyle/>
-          <a:p>
-            <a:pPr algn="ctr"/>
-            <a:r>
-              <a:rPr sz="4400" b="1" i="0">
+            <a:off x="640080" y="2052828"/>
+            <a:ext cx="10911535" cy="731520"/>
+          </a:xfrm>
+          <a:prstGeom prst="rect">
+            <a:avLst/>
+          </a:prstGeom>
+          <a:noFill/>
+        </p:spPr>
+        <p:txBody>
+          <a:bodyPr wrap="square">
+            <a:spAutoFit/>
+          </a:bodyPr>
+          <a:lstStyle/>
+          <a:p>
+            <a:pPr algn="ctr"/>
+            <a:r>
+              <a:rPr sz="4800" b="1" i="0">
                 <a:solidFill>
                   <a:srgbClr val="FFFFFF"/>
                 </a:solidFill>
@@ -6695,99 +5960,29 @@
         </p:nvSpPr>
         <p:spPr>
           <a:xfrm>
-            <a:off x="594360" y="2980944"/>
-            <a:ext cx="11002975" cy="347472"/>
-          </a:xfrm>
-          <a:prstGeom prst="rect">
-            <a:avLst/>
-          </a:prstGeom>
-          <a:noFill/>
-        </p:spPr>
-        <p:txBody>
-          <a:bodyPr wrap="square">
-            <a:spAutoFit/>
-          </a:bodyPr>
-          <a:lstStyle/>
-          <a:p>
-            <a:pPr algn="ctr"/>
-            <a:r>
-              <a:rPr sz="2200" b="0" i="1">
-                <a:solidFill>
-                  <a:srgbClr val="8C8C8C"/>
-                </a:solidFill>
-                <a:latin typeface="Arial"/>
-              </a:rPr>
-              <a:t/>
-            </a:r>
-          </a:p>
-        </p:txBody>
-      </p:sp>
-      <p:sp>
-        <p:nvSpPr>
-          <p:cNvPr id="4" name="TextBox 3"/>
-          <p:cNvSpPr txBox="1"/>
-          <p:nvPr/>
-        </p:nvSpPr>
-        <p:spPr>
-          <a:xfrm>
-            <a:off x="594360" y="3529584"/>
-            <a:ext cx="11002975" cy="685800"/>
-          </a:xfrm>
-          <a:prstGeom prst="rect">
-            <a:avLst/>
-          </a:prstGeom>
-          <a:noFill/>
-        </p:spPr>
-        <p:txBody>
-          <a:bodyPr wrap="square">
-            <a:spAutoFit/>
-          </a:bodyPr>
-          <a:lstStyle/>
-          <a:p>
-            <a:pPr algn="ctr"/>
-            <a:r>
-              <a:rPr sz="4400" b="1" i="0">
+            <a:off x="640080" y="2985516"/>
+            <a:ext cx="10911535" cy="731520"/>
+          </a:xfrm>
+          <a:prstGeom prst="rect">
+            <a:avLst/>
+          </a:prstGeom>
+          <a:noFill/>
+        </p:spPr>
+        <p:txBody>
+          <a:bodyPr wrap="square">
+            <a:spAutoFit/>
+          </a:bodyPr>
+          <a:lstStyle/>
+          <a:p>
+            <a:pPr algn="ctr"/>
+            <a:r>
+              <a:rPr sz="4800" b="1" i="0">
                 <a:solidFill>
                   <a:srgbClr val="FFFFFF"/>
                 </a:solidFill>
                 <a:latin typeface="Arial"/>
               </a:rPr>
               <a:t>Concebeu Cristo, o Filho</a:t>
-            </a:r>
-          </a:p>
-        </p:txBody>
-      </p:sp>
-      <p:sp>
-        <p:nvSpPr>
-          <p:cNvPr id="5" name="TextBox 4"/>
-          <p:cNvSpPr txBox="1"/>
-          <p:nvPr/>
-        </p:nvSpPr>
-        <p:spPr>
-          <a:xfrm>
-            <a:off x="594360" y="4251960"/>
-            <a:ext cx="11002975" cy="347472"/>
-          </a:xfrm>
-          <a:prstGeom prst="rect">
-            <a:avLst/>
-          </a:prstGeom>
-          <a:noFill/>
-        </p:spPr>
-        <p:txBody>
-          <a:bodyPr wrap="square">
-            <a:spAutoFit/>
-          </a:bodyPr>
-          <a:lstStyle/>
-          <a:p>
-            <a:pPr algn="ctr"/>
-            <a:r>
-              <a:rPr sz="2200" b="0" i="1">
-                <a:solidFill>
-                  <a:srgbClr val="8C8C8C"/>
-                </a:solidFill>
-                <a:latin typeface="Arial"/>
-              </a:rPr>
-              <a:t/>
             </a:r>
           </a:p>
         </p:txBody>
@@ -6826,23 +6021,23 @@
         </p:nvSpPr>
         <p:spPr>
           <a:xfrm>
-            <a:off x="594360" y="2258568"/>
-            <a:ext cx="11002975" cy="685800"/>
-          </a:xfrm>
-          <a:prstGeom prst="rect">
-            <a:avLst/>
-          </a:prstGeom>
-          <a:noFill/>
-        </p:spPr>
-        <p:txBody>
-          <a:bodyPr wrap="square">
-            <a:spAutoFit/>
-          </a:bodyPr>
-          <a:lstStyle/>
-          <a:p>
-            <a:pPr algn="ctr"/>
-            <a:r>
-              <a:rPr sz="4400" b="1" i="0">
+            <a:off x="640080" y="2052828"/>
+            <a:ext cx="10911535" cy="731520"/>
+          </a:xfrm>
+          <a:prstGeom prst="rect">
+            <a:avLst/>
+          </a:prstGeom>
+          <a:noFill/>
+        </p:spPr>
+        <p:txBody>
+          <a:bodyPr wrap="square">
+            <a:spAutoFit/>
+          </a:bodyPr>
+          <a:lstStyle/>
+          <a:p>
+            <a:pPr algn="ctr"/>
+            <a:r>
+              <a:rPr sz="4800" b="1" i="0">
                 <a:solidFill>
                   <a:srgbClr val="FFFFFF"/>
                 </a:solidFill>
@@ -6861,29 +6056,29 @@
         </p:nvSpPr>
         <p:spPr>
           <a:xfrm>
-            <a:off x="594360" y="2980944"/>
-            <a:ext cx="11002975" cy="347472"/>
-          </a:xfrm>
-          <a:prstGeom prst="rect">
-            <a:avLst/>
-          </a:prstGeom>
-          <a:noFill/>
-        </p:spPr>
-        <p:txBody>
-          <a:bodyPr wrap="square">
-            <a:spAutoFit/>
-          </a:bodyPr>
-          <a:lstStyle/>
-          <a:p>
-            <a:pPr algn="ctr"/>
-            <a:r>
-              <a:rPr sz="2200" b="0" i="1">
-                <a:solidFill>
-                  <a:srgbClr val="8C8C8C"/>
-                </a:solidFill>
-                <a:latin typeface="Arial"/>
-              </a:rPr>
-              <a:t/>
+            <a:off x="640080" y="2985516"/>
+            <a:ext cx="10911535" cy="731520"/>
+          </a:xfrm>
+          <a:prstGeom prst="rect">
+            <a:avLst/>
+          </a:prstGeom>
+          <a:noFill/>
+        </p:spPr>
+        <p:txBody>
+          <a:bodyPr wrap="square">
+            <a:spAutoFit/>
+          </a:bodyPr>
+          <a:lstStyle/>
+          <a:p>
+            <a:pPr algn="ctr"/>
+            <a:r>
+              <a:rPr sz="4800" b="1" i="0">
+                <a:solidFill>
+                  <a:srgbClr val="FFFFFF"/>
+                </a:solidFill>
+                <a:latin typeface="Arial"/>
+              </a:rPr>
+              <a:t>Creio em Deus, nosso Pai</a:t>
             </a:r>
           </a:p>
         </p:txBody>
@@ -6896,29 +6091,29 @@
         </p:nvSpPr>
         <p:spPr>
           <a:xfrm>
-            <a:off x="594360" y="3529584"/>
-            <a:ext cx="11002975" cy="685800"/>
-          </a:xfrm>
-          <a:prstGeom prst="rect">
-            <a:avLst/>
-          </a:prstGeom>
-          <a:noFill/>
-        </p:spPr>
-        <p:txBody>
-          <a:bodyPr wrap="square">
-            <a:spAutoFit/>
-          </a:bodyPr>
-          <a:lstStyle/>
-          <a:p>
-            <a:pPr algn="ctr"/>
-            <a:r>
-              <a:rPr sz="4400" b="1" i="0">
-                <a:solidFill>
-                  <a:srgbClr val="FFFFFF"/>
-                </a:solidFill>
-                <a:latin typeface="Arial"/>
-              </a:rPr>
-              <a:t>Creio em Deus, nosso Pai</a:t>
+            <a:off x="640080" y="4128516"/>
+            <a:ext cx="10911535" cy="310896"/>
+          </a:xfrm>
+          <a:prstGeom prst="rect">
+            <a:avLst/>
+          </a:prstGeom>
+          <a:noFill/>
+        </p:spPr>
+        <p:txBody>
+          <a:bodyPr wrap="square">
+            <a:spAutoFit/>
+          </a:bodyPr>
+          <a:lstStyle/>
+          <a:p>
+            <a:pPr algn="ctr"/>
+            <a:r>
+              <a:rPr sz="2000" b="0" i="0">
+                <a:solidFill>
+                  <a:srgbClr val="828282"/>
+                </a:solidFill>
+                <a:latin typeface="Arial"/>
+              </a:rPr>
+              <a:t>父なる我が    御神と       神の子   イエスと</a:t>
             </a:r>
           </a:p>
         </p:txBody>
@@ -6931,29 +6126,29 @@
         </p:nvSpPr>
         <p:spPr>
           <a:xfrm>
-            <a:off x="594360" y="4251960"/>
-            <a:ext cx="11002975" cy="347472"/>
-          </a:xfrm>
-          <a:prstGeom prst="rect">
-            <a:avLst/>
-          </a:prstGeom>
-          <a:noFill/>
-        </p:spPr>
-        <p:txBody>
-          <a:bodyPr wrap="square">
-            <a:spAutoFit/>
-          </a:bodyPr>
-          <a:lstStyle/>
-          <a:p>
-            <a:pPr algn="ctr"/>
-            <a:r>
-              <a:rPr sz="2200" b="0" i="1">
-                <a:solidFill>
-                  <a:srgbClr val="8C8C8C"/>
-                </a:solidFill>
-                <a:latin typeface="Arial"/>
-              </a:rPr>
-              <a:t/>
+            <a:off x="640080" y="4494276"/>
+            <a:ext cx="10911535" cy="310896"/>
+          </a:xfrm>
+          <a:prstGeom prst="rect">
+            <a:avLst/>
+          </a:prstGeom>
+          <a:noFill/>
+        </p:spPr>
+        <p:txBody>
+          <a:bodyPr wrap="square">
+            <a:spAutoFit/>
+          </a:bodyPr>
+          <a:lstStyle/>
+          <a:p>
+            <a:pPr algn="ctr"/>
+            <a:r>
+              <a:rPr sz="2000" b="0" i="0">
+                <a:solidFill>
+                  <a:srgbClr val="828282"/>
+                </a:solidFill>
+                <a:latin typeface="Arial"/>
+              </a:rPr>
+              <a:t>聖霊のこの三位を　     私は信じる</a:t>
             </a:r>
           </a:p>
         </p:txBody>
@@ -6992,23 +6187,23 @@
         </p:nvSpPr>
         <p:spPr>
           <a:xfrm>
-            <a:off x="594360" y="2258568"/>
-            <a:ext cx="11002975" cy="685800"/>
-          </a:xfrm>
-          <a:prstGeom prst="rect">
-            <a:avLst/>
-          </a:prstGeom>
-          <a:noFill/>
-        </p:spPr>
-        <p:txBody>
-          <a:bodyPr wrap="square">
-            <a:spAutoFit/>
-          </a:bodyPr>
-          <a:lstStyle/>
-          <a:p>
-            <a:pPr algn="ctr"/>
-            <a:r>
-              <a:rPr sz="4400" b="1" i="0">
+            <a:off x="640080" y="2052828"/>
+            <a:ext cx="10911535" cy="731520"/>
+          </a:xfrm>
+          <a:prstGeom prst="rect">
+            <a:avLst/>
+          </a:prstGeom>
+          <a:noFill/>
+        </p:spPr>
+        <p:txBody>
+          <a:bodyPr wrap="square">
+            <a:spAutoFit/>
+          </a:bodyPr>
+          <a:lstStyle/>
+          <a:p>
+            <a:pPr algn="ctr"/>
+            <a:r>
+              <a:rPr sz="4800" b="1" i="0">
                 <a:solidFill>
                   <a:srgbClr val="FFFFFF"/>
                 </a:solidFill>
@@ -7027,29 +6222,29 @@
         </p:nvSpPr>
         <p:spPr>
           <a:xfrm>
-            <a:off x="594360" y="2980944"/>
-            <a:ext cx="11002975" cy="347472"/>
-          </a:xfrm>
-          <a:prstGeom prst="rect">
-            <a:avLst/>
-          </a:prstGeom>
-          <a:noFill/>
-        </p:spPr>
-        <p:txBody>
-          <a:bodyPr wrap="square">
-            <a:spAutoFit/>
-          </a:bodyPr>
-          <a:lstStyle/>
-          <a:p>
-            <a:pPr algn="ctr"/>
-            <a:r>
-              <a:rPr sz="2200" b="0" i="1">
-                <a:solidFill>
-                  <a:srgbClr val="8C8C8C"/>
-                </a:solidFill>
-                <a:latin typeface="Arial"/>
-              </a:rPr>
-              <a:t/>
+            <a:off x="640080" y="2985516"/>
+            <a:ext cx="10911535" cy="731520"/>
+          </a:xfrm>
+          <a:prstGeom prst="rect">
+            <a:avLst/>
+          </a:prstGeom>
+          <a:noFill/>
+        </p:spPr>
+        <p:txBody>
+          <a:bodyPr wrap="square">
+            <a:spAutoFit/>
+          </a:bodyPr>
+          <a:lstStyle/>
+          <a:p>
+            <a:pPr algn="ctr"/>
+            <a:r>
+              <a:rPr sz="4800" b="1" i="0">
+                <a:solidFill>
+                  <a:srgbClr val="FFFFFF"/>
+                </a:solidFill>
+                <a:latin typeface="Arial"/>
+              </a:rPr>
+              <a:t>Creio no Espírito Santo</a:t>
             </a:r>
           </a:p>
         </p:txBody>
@@ -7062,29 +6257,29 @@
         </p:nvSpPr>
         <p:spPr>
           <a:xfrm>
-            <a:off x="594360" y="3529584"/>
-            <a:ext cx="11002975" cy="685800"/>
-          </a:xfrm>
-          <a:prstGeom prst="rect">
-            <a:avLst/>
-          </a:prstGeom>
-          <a:noFill/>
-        </p:spPr>
-        <p:txBody>
-          <a:bodyPr wrap="square">
-            <a:spAutoFit/>
-          </a:bodyPr>
-          <a:lstStyle/>
-          <a:p>
-            <a:pPr algn="ctr"/>
-            <a:r>
-              <a:rPr sz="4400" b="1" i="0">
-                <a:solidFill>
-                  <a:srgbClr val="FFFFFF"/>
-                </a:solidFill>
-                <a:latin typeface="Arial"/>
-              </a:rPr>
-              <a:t>Creio no Espírito Santo</a:t>
+            <a:off x="640080" y="4128516"/>
+            <a:ext cx="10911535" cy="310896"/>
+          </a:xfrm>
+          <a:prstGeom prst="rect">
+            <a:avLst/>
+          </a:prstGeom>
+          <a:noFill/>
+        </p:spPr>
+        <p:txBody>
+          <a:bodyPr wrap="square">
+            <a:spAutoFit/>
+          </a:bodyPr>
+          <a:lstStyle/>
+          <a:p>
+            <a:pPr algn="ctr"/>
+            <a:r>
+              <a:rPr sz="2000" b="0" i="0">
+                <a:solidFill>
+                  <a:srgbClr val="828282"/>
+                </a:solidFill>
+                <a:latin typeface="Arial"/>
+              </a:rPr>
+              <a:t>よみがえりの力で　   よみがえることを</a:t>
             </a:r>
           </a:p>
         </p:txBody>
@@ -7097,29 +6292,29 @@
         </p:nvSpPr>
         <p:spPr>
           <a:xfrm>
-            <a:off x="594360" y="4251960"/>
-            <a:ext cx="11002975" cy="347472"/>
-          </a:xfrm>
-          <a:prstGeom prst="rect">
-            <a:avLst/>
-          </a:prstGeom>
-          <a:noFill/>
-        </p:spPr>
-        <p:txBody>
-          <a:bodyPr wrap="square">
-            <a:spAutoFit/>
-          </a:bodyPr>
-          <a:lstStyle/>
-          <a:p>
-            <a:pPr algn="ctr"/>
-            <a:r>
-              <a:rPr sz="2200" b="0" i="1">
-                <a:solidFill>
-                  <a:srgbClr val="8C8C8C"/>
-                </a:solidFill>
-                <a:latin typeface="Arial"/>
-              </a:rPr>
-              <a:t/>
+            <a:off x="640080" y="4494276"/>
+            <a:ext cx="10911535" cy="310896"/>
+          </a:xfrm>
+          <a:prstGeom prst="rect">
+            <a:avLst/>
+          </a:prstGeom>
+          <a:noFill/>
+        </p:spPr>
+        <p:txBody>
+          <a:bodyPr wrap="square">
+            <a:spAutoFit/>
+          </a:bodyPr>
+          <a:lstStyle/>
+          <a:p>
+            <a:pPr algn="ctr"/>
+            <a:r>
+              <a:rPr sz="2000" b="0" i="0">
+                <a:solidFill>
+                  <a:srgbClr val="828282"/>
+                </a:solidFill>
+                <a:latin typeface="Arial"/>
+              </a:rPr>
+              <a:t>主の御名で    私は        信じよう</a:t>
             </a:r>
           </a:p>
         </p:txBody>
@@ -7158,23 +6353,23 @@
         </p:nvSpPr>
         <p:spPr>
           <a:xfrm>
-            <a:off x="594360" y="2258568"/>
-            <a:ext cx="11002975" cy="685800"/>
-          </a:xfrm>
-          <a:prstGeom prst="rect">
-            <a:avLst/>
-          </a:prstGeom>
-          <a:noFill/>
-        </p:spPr>
-        <p:txBody>
-          <a:bodyPr wrap="square">
-            <a:spAutoFit/>
-          </a:bodyPr>
-          <a:lstStyle/>
-          <a:p>
-            <a:pPr algn="ctr"/>
-            <a:r>
-              <a:rPr sz="4400" b="1" i="0">
+            <a:off x="640080" y="2052828"/>
+            <a:ext cx="10911535" cy="731520"/>
+          </a:xfrm>
+          <a:prstGeom prst="rect">
+            <a:avLst/>
+          </a:prstGeom>
+          <a:noFill/>
+        </p:spPr>
+        <p:txBody>
+          <a:bodyPr wrap="square">
+            <a:spAutoFit/>
+          </a:bodyPr>
+          <a:lstStyle/>
+          <a:p>
+            <a:pPr algn="ctr"/>
+            <a:r>
+              <a:rPr sz="4800" b="1" i="0">
                 <a:solidFill>
                   <a:srgbClr val="FFFFFF"/>
                 </a:solidFill>
@@ -7193,29 +6388,29 @@
         </p:nvSpPr>
         <p:spPr>
           <a:xfrm>
-            <a:off x="594360" y="2980944"/>
-            <a:ext cx="11002975" cy="347472"/>
-          </a:xfrm>
-          <a:prstGeom prst="rect">
-            <a:avLst/>
-          </a:prstGeom>
-          <a:noFill/>
-        </p:spPr>
-        <p:txBody>
-          <a:bodyPr wrap="square">
-            <a:spAutoFit/>
-          </a:bodyPr>
-          <a:lstStyle/>
-          <a:p>
-            <a:pPr algn="ctr"/>
-            <a:r>
-              <a:rPr sz="2200" b="0" i="1">
-                <a:solidFill>
-                  <a:srgbClr val="8C8C8C"/>
-                </a:solidFill>
-                <a:latin typeface="Arial"/>
-              </a:rPr>
-              <a:t/>
+            <a:off x="640080" y="2985516"/>
+            <a:ext cx="10911535" cy="731520"/>
+          </a:xfrm>
+          <a:prstGeom prst="rect">
+            <a:avLst/>
+          </a:prstGeom>
+          <a:noFill/>
+        </p:spPr>
+        <p:txBody>
+          <a:bodyPr wrap="square">
+            <a:spAutoFit/>
+          </a:bodyPr>
+          <a:lstStyle/>
+          <a:p>
+            <a:pPr algn="ctr"/>
+            <a:r>
+              <a:rPr sz="4800" b="1" i="0">
+                <a:solidFill>
+                  <a:srgbClr val="FFFFFF"/>
+                </a:solidFill>
+                <a:latin typeface="Arial"/>
+              </a:rPr>
+              <a:t>Creio na ressurreição</a:t>
             </a:r>
           </a:p>
         </p:txBody>
@@ -7228,29 +6423,29 @@
         </p:nvSpPr>
         <p:spPr>
           <a:xfrm>
-            <a:off x="594360" y="3529584"/>
-            <a:ext cx="11002975" cy="685800"/>
-          </a:xfrm>
-          <a:prstGeom prst="rect">
-            <a:avLst/>
-          </a:prstGeom>
-          <a:noFill/>
-        </p:spPr>
-        <p:txBody>
-          <a:bodyPr wrap="square">
-            <a:spAutoFit/>
-          </a:bodyPr>
-          <a:lstStyle/>
-          <a:p>
-            <a:pPr algn="ctr"/>
-            <a:r>
-              <a:rPr sz="4400" b="1" i="0">
-                <a:solidFill>
-                  <a:srgbClr val="FFFFFF"/>
-                </a:solidFill>
-                <a:latin typeface="Arial"/>
-              </a:rPr>
-              <a:t>Creio na ressurreição</a:t>
+            <a:off x="640080" y="4128516"/>
+            <a:ext cx="10911535" cy="310896"/>
+          </a:xfrm>
+          <a:prstGeom prst="rect">
+            <a:avLst/>
+          </a:prstGeom>
+          <a:noFill/>
+        </p:spPr>
+        <p:txBody>
+          <a:bodyPr wrap="square">
+            <a:spAutoFit/>
+          </a:bodyPr>
+          <a:lstStyle/>
+          <a:p>
+            <a:pPr algn="ctr"/>
+            <a:r>
+              <a:rPr sz="2000" b="0" i="0">
+                <a:solidFill>
+                  <a:srgbClr val="828282"/>
+                </a:solidFill>
+                <a:latin typeface="Arial"/>
+              </a:rPr>
+              <a:t>父なる我が    御神と       神の子   イエスと</a:t>
             </a:r>
           </a:p>
         </p:txBody>
@@ -7263,29 +6458,29 @@
         </p:nvSpPr>
         <p:spPr>
           <a:xfrm>
-            <a:off x="594360" y="4251960"/>
-            <a:ext cx="11002975" cy="347472"/>
-          </a:xfrm>
-          <a:prstGeom prst="rect">
-            <a:avLst/>
-          </a:prstGeom>
-          <a:noFill/>
-        </p:spPr>
-        <p:txBody>
-          <a:bodyPr wrap="square">
-            <a:spAutoFit/>
-          </a:bodyPr>
-          <a:lstStyle/>
-          <a:p>
-            <a:pPr algn="ctr"/>
-            <a:r>
-              <a:rPr sz="2200" b="0" i="1">
-                <a:solidFill>
-                  <a:srgbClr val="8C8C8C"/>
-                </a:solidFill>
-                <a:latin typeface="Arial"/>
-              </a:rPr>
-              <a:t/>
+            <a:off x="640080" y="4494276"/>
+            <a:ext cx="10911535" cy="310896"/>
+          </a:xfrm>
+          <a:prstGeom prst="rect">
+            <a:avLst/>
+          </a:prstGeom>
+          <a:noFill/>
+        </p:spPr>
+        <p:txBody>
+          <a:bodyPr wrap="square">
+            <a:spAutoFit/>
+          </a:bodyPr>
+          <a:lstStyle/>
+          <a:p>
+            <a:pPr algn="ctr"/>
+            <a:r>
+              <a:rPr sz="2000" b="0" i="0">
+                <a:solidFill>
+                  <a:srgbClr val="828282"/>
+                </a:solidFill>
+                <a:latin typeface="Arial"/>
+              </a:rPr>
+              <a:t>聖霊のこの三位を　     私は信じる</a:t>
             </a:r>
           </a:p>
         </p:txBody>
@@ -7324,23 +6519,23 @@
         </p:nvSpPr>
         <p:spPr>
           <a:xfrm>
-            <a:off x="594360" y="2258568"/>
-            <a:ext cx="11002975" cy="685800"/>
-          </a:xfrm>
-          <a:prstGeom prst="rect">
-            <a:avLst/>
-          </a:prstGeom>
-          <a:noFill/>
-        </p:spPr>
-        <p:txBody>
-          <a:bodyPr wrap="square">
-            <a:spAutoFit/>
-          </a:bodyPr>
-          <a:lstStyle/>
-          <a:p>
-            <a:pPr algn="ctr"/>
-            <a:r>
-              <a:rPr sz="4400" b="1" i="0">
+            <a:off x="640080" y="2052828"/>
+            <a:ext cx="10911535" cy="731520"/>
+          </a:xfrm>
+          <a:prstGeom prst="rect">
+            <a:avLst/>
+          </a:prstGeom>
+          <a:noFill/>
+        </p:spPr>
+        <p:txBody>
+          <a:bodyPr wrap="square">
+            <a:spAutoFit/>
+          </a:bodyPr>
+          <a:lstStyle/>
+          <a:p>
+            <a:pPr algn="ctr"/>
+            <a:r>
+              <a:rPr sz="4800" b="1" i="0">
                 <a:solidFill>
                   <a:srgbClr val="FFFFFF"/>
                 </a:solidFill>
@@ -7359,29 +6554,29 @@
         </p:nvSpPr>
         <p:spPr>
           <a:xfrm>
-            <a:off x="594360" y="2980944"/>
-            <a:ext cx="11002975" cy="347472"/>
-          </a:xfrm>
-          <a:prstGeom prst="rect">
-            <a:avLst/>
-          </a:prstGeom>
-          <a:noFill/>
-        </p:spPr>
-        <p:txBody>
-          <a:bodyPr wrap="square">
-            <a:spAutoFit/>
-          </a:bodyPr>
-          <a:lstStyle/>
-          <a:p>
-            <a:pPr algn="ctr"/>
-            <a:r>
-              <a:rPr sz="2200" b="0" i="1">
-                <a:solidFill>
-                  <a:srgbClr val="8C8C8C"/>
-                </a:solidFill>
-                <a:latin typeface="Arial"/>
-              </a:rPr>
-              <a:t/>
+            <a:off x="640080" y="2985516"/>
+            <a:ext cx="10911535" cy="731520"/>
+          </a:xfrm>
+          <a:prstGeom prst="rect">
+            <a:avLst/>
+          </a:prstGeom>
+          <a:noFill/>
+        </p:spPr>
+        <p:txBody>
+          <a:bodyPr wrap="square">
+            <a:spAutoFit/>
+          </a:bodyPr>
+          <a:lstStyle/>
+          <a:p>
+            <a:pPr algn="ctr"/>
+            <a:r>
+              <a:rPr sz="4800" b="1" i="0">
+                <a:solidFill>
+                  <a:srgbClr val="FFFFFF"/>
+                </a:solidFill>
+                <a:latin typeface="Arial"/>
+              </a:rPr>
+              <a:t>O perdão está em Ti</a:t>
             </a:r>
           </a:p>
         </p:txBody>
@@ -7394,29 +6589,29 @@
         </p:nvSpPr>
         <p:spPr>
           <a:xfrm>
-            <a:off x="594360" y="3529584"/>
-            <a:ext cx="11002975" cy="685800"/>
-          </a:xfrm>
-          <a:prstGeom prst="rect">
-            <a:avLst/>
-          </a:prstGeom>
-          <a:noFill/>
-        </p:spPr>
-        <p:txBody>
-          <a:bodyPr wrap="square">
-            <a:spAutoFit/>
-          </a:bodyPr>
-          <a:lstStyle/>
-          <a:p>
-            <a:pPr algn="ctr"/>
-            <a:r>
-              <a:rPr sz="4400" b="1" i="0">
-                <a:solidFill>
-                  <a:srgbClr val="FFFFFF"/>
-                </a:solidFill>
-                <a:latin typeface="Arial"/>
-              </a:rPr>
-              <a:t>O perdão está em Ti</a:t>
+            <a:off x="640080" y="4128516"/>
+            <a:ext cx="10911535" cy="310896"/>
+          </a:xfrm>
+          <a:prstGeom prst="rect">
+            <a:avLst/>
+          </a:prstGeom>
+          <a:noFill/>
+        </p:spPr>
+        <p:txBody>
+          <a:bodyPr wrap="square">
+            <a:spAutoFit/>
+          </a:bodyPr>
+          <a:lstStyle/>
+          <a:p>
+            <a:pPr algn="ctr"/>
+            <a:r>
+              <a:rPr sz="2000" b="0" i="0">
+                <a:solidFill>
+                  <a:srgbClr val="828282"/>
+                </a:solidFill>
+                <a:latin typeface="Arial"/>
+              </a:rPr>
+              <a:t>よみがえりの力で　   よみがえることを</a:t>
             </a:r>
           </a:p>
         </p:txBody>
@@ -7429,29 +6624,29 @@
         </p:nvSpPr>
         <p:spPr>
           <a:xfrm>
-            <a:off x="594360" y="4251960"/>
-            <a:ext cx="11002975" cy="347472"/>
-          </a:xfrm>
-          <a:prstGeom prst="rect">
-            <a:avLst/>
-          </a:prstGeom>
-          <a:noFill/>
-        </p:spPr>
-        <p:txBody>
-          <a:bodyPr wrap="square">
-            <a:spAutoFit/>
-          </a:bodyPr>
-          <a:lstStyle/>
-          <a:p>
-            <a:pPr algn="ctr"/>
-            <a:r>
-              <a:rPr sz="2200" b="0" i="1">
-                <a:solidFill>
-                  <a:srgbClr val="8C8C8C"/>
-                </a:solidFill>
-                <a:latin typeface="Arial"/>
-              </a:rPr>
-              <a:t/>
+            <a:off x="640080" y="4494276"/>
+            <a:ext cx="10911535" cy="310896"/>
+          </a:xfrm>
+          <a:prstGeom prst="rect">
+            <a:avLst/>
+          </a:prstGeom>
+          <a:noFill/>
+        </p:spPr>
+        <p:txBody>
+          <a:bodyPr wrap="square">
+            <a:spAutoFit/>
+          </a:bodyPr>
+          <a:lstStyle/>
+          <a:p>
+            <a:pPr algn="ctr"/>
+            <a:r>
+              <a:rPr sz="2000" b="0" i="0">
+                <a:solidFill>
+                  <a:srgbClr val="828282"/>
+                </a:solidFill>
+                <a:latin typeface="Arial"/>
+              </a:rPr>
+              <a:t>主の御名で    私は        信じよう</a:t>
             </a:r>
           </a:p>
         </p:txBody>
@@ -7490,23 +6685,23 @@
         </p:nvSpPr>
         <p:spPr>
           <a:xfrm>
-            <a:off x="594360" y="2258568"/>
-            <a:ext cx="11002975" cy="685800"/>
-          </a:xfrm>
-          <a:prstGeom prst="rect">
-            <a:avLst/>
-          </a:prstGeom>
-          <a:noFill/>
-        </p:spPr>
-        <p:txBody>
-          <a:bodyPr wrap="square">
-            <a:spAutoFit/>
-          </a:bodyPr>
-          <a:lstStyle/>
-          <a:p>
-            <a:pPr algn="ctr"/>
-            <a:r>
-              <a:rPr sz="4400" b="1" i="0">
+            <a:off x="640080" y="2052828"/>
+            <a:ext cx="10911535" cy="731520"/>
+          </a:xfrm>
+          <a:prstGeom prst="rect">
+            <a:avLst/>
+          </a:prstGeom>
+          <a:noFill/>
+        </p:spPr>
+        <p:txBody>
+          <a:bodyPr wrap="square">
+            <a:spAutoFit/>
+          </a:bodyPr>
+          <a:lstStyle/>
+          <a:p>
+            <a:pPr algn="ctr"/>
+            <a:r>
+              <a:rPr sz="4800" b="1" i="0">
                 <a:solidFill>
                   <a:srgbClr val="FFFFFF"/>
                 </a:solidFill>
@@ -7525,99 +6720,29 @@
         </p:nvSpPr>
         <p:spPr>
           <a:xfrm>
-            <a:off x="594360" y="2980944"/>
-            <a:ext cx="11002975" cy="347472"/>
-          </a:xfrm>
-          <a:prstGeom prst="rect">
-            <a:avLst/>
-          </a:prstGeom>
-          <a:noFill/>
-        </p:spPr>
-        <p:txBody>
-          <a:bodyPr wrap="square">
-            <a:spAutoFit/>
-          </a:bodyPr>
-          <a:lstStyle/>
-          <a:p>
-            <a:pPr algn="ctr"/>
-            <a:r>
-              <a:rPr sz="2200" b="0" i="1">
-                <a:solidFill>
-                  <a:srgbClr val="8C8C8C"/>
-                </a:solidFill>
-                <a:latin typeface="Arial"/>
-              </a:rPr>
-              <a:t/>
-            </a:r>
-          </a:p>
-        </p:txBody>
-      </p:sp>
-      <p:sp>
-        <p:nvSpPr>
-          <p:cNvPr id="4" name="TextBox 3"/>
-          <p:cNvSpPr txBox="1"/>
-          <p:nvPr/>
-        </p:nvSpPr>
-        <p:spPr>
-          <a:xfrm>
-            <a:off x="594360" y="3529584"/>
-            <a:ext cx="11002975" cy="685800"/>
-          </a:xfrm>
-          <a:prstGeom prst="rect">
-            <a:avLst/>
-          </a:prstGeom>
-          <a:noFill/>
-        </p:spPr>
-        <p:txBody>
-          <a:bodyPr wrap="square">
-            <a:spAutoFit/>
-          </a:bodyPr>
-          <a:lstStyle/>
-          <a:p>
-            <a:pPr algn="ctr"/>
-            <a:r>
-              <a:rPr sz="4400" b="1" i="0">
+            <a:off x="640080" y="2985516"/>
+            <a:ext cx="10911535" cy="731520"/>
+          </a:xfrm>
+          <a:prstGeom prst="rect">
+            <a:avLst/>
+          </a:prstGeom>
+          <a:noFill/>
+        </p:spPr>
+        <p:txBody>
+          <a:bodyPr wrap="square">
+            <a:spAutoFit/>
+          </a:bodyPr>
+          <a:lstStyle/>
+          <a:p>
+            <a:pPr algn="ctr"/>
+            <a:r>
+              <a:rPr sz="4800" b="1" i="0">
                 <a:solidFill>
                   <a:srgbClr val="FFFFFF"/>
                 </a:solidFill>
                 <a:latin typeface="Arial"/>
               </a:rPr>
               <a:t>Ressurgiu em gloriosa vida</a:t>
-            </a:r>
-          </a:p>
-        </p:txBody>
-      </p:sp>
-      <p:sp>
-        <p:nvSpPr>
-          <p:cNvPr id="5" name="TextBox 4"/>
-          <p:cNvSpPr txBox="1"/>
-          <p:nvPr/>
-        </p:nvSpPr>
-        <p:spPr>
-          <a:xfrm>
-            <a:off x="594360" y="4251960"/>
-            <a:ext cx="11002975" cy="347472"/>
-          </a:xfrm>
-          <a:prstGeom prst="rect">
-            <a:avLst/>
-          </a:prstGeom>
-          <a:noFill/>
-        </p:spPr>
-        <p:txBody>
-          <a:bodyPr wrap="square">
-            <a:spAutoFit/>
-          </a:bodyPr>
-          <a:lstStyle/>
-          <a:p>
-            <a:pPr algn="ctr"/>
-            <a:r>
-              <a:rPr sz="2200" b="0" i="1">
-                <a:solidFill>
-                  <a:srgbClr val="8C8C8C"/>
-                </a:solidFill>
-                <a:latin typeface="Arial"/>
-              </a:rPr>
-              <a:t/>
             </a:r>
           </a:p>
         </p:txBody>
@@ -7656,23 +6781,23 @@
         </p:nvSpPr>
         <p:spPr>
           <a:xfrm>
-            <a:off x="594360" y="2258568"/>
-            <a:ext cx="11002975" cy="685800"/>
-          </a:xfrm>
-          <a:prstGeom prst="rect">
-            <a:avLst/>
-          </a:prstGeom>
-          <a:noFill/>
-        </p:spPr>
-        <p:txBody>
-          <a:bodyPr wrap="square">
-            <a:spAutoFit/>
-          </a:bodyPr>
-          <a:lstStyle/>
-          <a:p>
-            <a:pPr algn="ctr"/>
-            <a:r>
-              <a:rPr sz="4400" b="1" i="0">
+            <a:off x="640080" y="2052828"/>
+            <a:ext cx="10911535" cy="731520"/>
+          </a:xfrm>
+          <a:prstGeom prst="rect">
+            <a:avLst/>
+          </a:prstGeom>
+          <a:noFill/>
+        </p:spPr>
+        <p:txBody>
+          <a:bodyPr wrap="square">
+            <a:spAutoFit/>
+          </a:bodyPr>
+          <a:lstStyle/>
+          <a:p>
+            <a:pPr algn="ctr"/>
+            <a:r>
+              <a:rPr sz="4800" b="1" i="0">
                 <a:solidFill>
                   <a:srgbClr val="FFFFFF"/>
                 </a:solidFill>
@@ -7691,99 +6816,29 @@
         </p:nvSpPr>
         <p:spPr>
           <a:xfrm>
-            <a:off x="594360" y="2980944"/>
-            <a:ext cx="11002975" cy="347472"/>
-          </a:xfrm>
-          <a:prstGeom prst="rect">
-            <a:avLst/>
-          </a:prstGeom>
-          <a:noFill/>
-        </p:spPr>
-        <p:txBody>
-          <a:bodyPr wrap="square">
-            <a:spAutoFit/>
-          </a:bodyPr>
-          <a:lstStyle/>
-          <a:p>
-            <a:pPr algn="ctr"/>
-            <a:r>
-              <a:rPr sz="2200" b="0" i="1">
-                <a:solidFill>
-                  <a:srgbClr val="8C8C8C"/>
-                </a:solidFill>
-                <a:latin typeface="Arial"/>
-              </a:rPr>
-              <a:t/>
-            </a:r>
-          </a:p>
-        </p:txBody>
-      </p:sp>
-      <p:sp>
-        <p:nvSpPr>
-          <p:cNvPr id="4" name="TextBox 3"/>
-          <p:cNvSpPr txBox="1"/>
-          <p:nvPr/>
-        </p:nvSpPr>
-        <p:spPr>
-          <a:xfrm>
-            <a:off x="594360" y="3529584"/>
-            <a:ext cx="11002975" cy="685800"/>
-          </a:xfrm>
-          <a:prstGeom prst="rect">
-            <a:avLst/>
-          </a:prstGeom>
-          <a:noFill/>
-        </p:spPr>
-        <p:txBody>
-          <a:bodyPr wrap="square">
-            <a:spAutoFit/>
-          </a:bodyPr>
-          <a:lstStyle/>
-          <a:p>
-            <a:pPr algn="ctr"/>
-            <a:r>
-              <a:rPr sz="4400" b="1" i="0">
+            <a:off x="640080" y="2985516"/>
+            <a:ext cx="10911535" cy="731520"/>
+          </a:xfrm>
+          <a:prstGeom prst="rect">
+            <a:avLst/>
+          </a:prstGeom>
+          <a:noFill/>
+        </p:spPr>
+        <p:txBody>
+          <a:bodyPr wrap="square">
+            <a:spAutoFit/>
+          </a:bodyPr>
+          <a:lstStyle/>
+          <a:p>
+            <a:pPr algn="ctr"/>
+            <a:r>
+              <a:rPr sz="4800" b="1" i="0">
                 <a:solidFill>
                   <a:srgbClr val="FFFFFF"/>
                 </a:solidFill>
                 <a:latin typeface="Arial"/>
               </a:rPr>
               <a:t>E retornará para reinar</a:t>
-            </a:r>
-          </a:p>
-        </p:txBody>
-      </p:sp>
-      <p:sp>
-        <p:nvSpPr>
-          <p:cNvPr id="5" name="TextBox 4"/>
-          <p:cNvSpPr txBox="1"/>
-          <p:nvPr/>
-        </p:nvSpPr>
-        <p:spPr>
-          <a:xfrm>
-            <a:off x="594360" y="4251960"/>
-            <a:ext cx="11002975" cy="347472"/>
-          </a:xfrm>
-          <a:prstGeom prst="rect">
-            <a:avLst/>
-          </a:prstGeom>
-          <a:noFill/>
-        </p:spPr>
-        <p:txBody>
-          <a:bodyPr wrap="square">
-            <a:spAutoFit/>
-          </a:bodyPr>
-          <a:lstStyle/>
-          <a:p>
-            <a:pPr algn="ctr"/>
-            <a:r>
-              <a:rPr sz="2200" b="0" i="1">
-                <a:solidFill>
-                  <a:srgbClr val="8C8C8C"/>
-                </a:solidFill>
-                <a:latin typeface="Arial"/>
-              </a:rPr>
-              <a:t/>
             </a:r>
           </a:p>
         </p:txBody>

--- a/output_pptx/This_I_Believe_The_Creed.pptx
+++ b/output_pptx/This_I_Believe_The_Creed.pptx
@@ -3192,6 +3192,76 @@
           </a:p>
         </p:txBody>
       </p:sp>
+      <p:sp>
+        <p:nvSpPr>
+          <p:cNvPr id="4" name="TextBox 3"/>
+          <p:cNvSpPr txBox="1"/>
+          <p:nvPr/>
+        </p:nvSpPr>
+        <p:spPr>
+          <a:xfrm>
+            <a:off x="640080" y="4128516"/>
+            <a:ext cx="10911535" cy="310896"/>
+          </a:xfrm>
+          <a:prstGeom prst="rect">
+            <a:avLst/>
+          </a:prstGeom>
+          <a:noFill/>
+        </p:spPr>
+        <p:txBody>
+          <a:bodyPr wrap="square">
+            <a:spAutoFit/>
+          </a:bodyPr>
+          <a:lstStyle/>
+          <a:p>
+            <a:pPr algn="ctr"/>
+            <a:r>
+              <a:rPr sz="2000" b="0" i="0">
+                <a:solidFill>
+                  <a:srgbClr val="828282"/>
+                </a:solidFill>
+                <a:latin typeface="Arial"/>
+              </a:rPr>
+              <a:t>これが私の信仰（信条）</a:t>
+            </a:r>
+          </a:p>
+        </p:txBody>
+      </p:sp>
+      <p:sp>
+        <p:nvSpPr>
+          <p:cNvPr id="5" name="TextBox 4"/>
+          <p:cNvSpPr txBox="1"/>
+          <p:nvPr/>
+        </p:nvSpPr>
+        <p:spPr>
+          <a:xfrm>
+            <a:off x="640080" y="4494276"/>
+            <a:ext cx="10911535" cy="310896"/>
+          </a:xfrm>
+          <a:prstGeom prst="rect">
+            <a:avLst/>
+          </a:prstGeom>
+          <a:noFill/>
+        </p:spPr>
+        <p:txBody>
+          <a:bodyPr wrap="square">
+            <a:spAutoFit/>
+          </a:bodyPr>
+          <a:lstStyle/>
+          <a:p>
+            <a:pPr algn="ctr"/>
+            <a:r>
+              <a:rPr sz="2000" b="0" i="0">
+                <a:solidFill>
+                  <a:srgbClr val="828282"/>
+                </a:solidFill>
+                <a:latin typeface="Arial"/>
+              </a:rPr>
+              <a:t>私たちの永遠の父</a:t>
+            </a:r>
+          </a:p>
+        </p:txBody>
+      </p:sp>
     </p:spTree>
   </p:cSld>
   <p:clrMapOvr>
@@ -3288,6 +3358,76 @@
           </a:p>
         </p:txBody>
       </p:sp>
+      <p:sp>
+        <p:nvSpPr>
+          <p:cNvPr id="4" name="TextBox 3"/>
+          <p:cNvSpPr txBox="1"/>
+          <p:nvPr/>
+        </p:nvSpPr>
+        <p:spPr>
+          <a:xfrm>
+            <a:off x="640080" y="4128516"/>
+            <a:ext cx="10911535" cy="310896"/>
+          </a:xfrm>
+          <a:prstGeom prst="rect">
+            <a:avLst/>
+          </a:prstGeom>
+          <a:noFill/>
+        </p:spPr>
+        <p:txBody>
+          <a:bodyPr wrap="square">
+            <a:spAutoFit/>
+          </a:bodyPr>
+          <a:lstStyle/>
+          <a:p>
+            <a:pPr algn="ctr"/>
+            <a:r>
+              <a:rPr sz="2000" b="0" i="0">
+                <a:solidFill>
+                  <a:srgbClr val="828282"/>
+                </a:solidFill>
+                <a:latin typeface="Arial"/>
+              </a:rPr>
+              <a:t>私たちの父なる神を信じます</a:t>
+            </a:r>
+          </a:p>
+        </p:txBody>
+      </p:sp>
+      <p:sp>
+        <p:nvSpPr>
+          <p:cNvPr id="5" name="TextBox 4"/>
+          <p:cNvSpPr txBox="1"/>
+          <p:nvPr/>
+        </p:nvSpPr>
+        <p:spPr>
+          <a:xfrm>
+            <a:off x="640080" y="4494276"/>
+            <a:ext cx="10911535" cy="310896"/>
+          </a:xfrm>
+          <a:prstGeom prst="rect">
+            <a:avLst/>
+          </a:prstGeom>
+          <a:noFill/>
+        </p:spPr>
+        <p:txBody>
+          <a:bodyPr wrap="square">
+            <a:spAutoFit/>
+          </a:bodyPr>
+          <a:lstStyle/>
+          <a:p>
+            <a:pPr algn="ctr"/>
+            <a:r>
+              <a:rPr sz="2000" b="0" i="0">
+                <a:solidFill>
+                  <a:srgbClr val="828282"/>
+                </a:solidFill>
+                <a:latin typeface="Arial"/>
+              </a:rPr>
+              <a:t>御子キリストを信じます</a:t>
+            </a:r>
+          </a:p>
+        </p:txBody>
+      </p:sp>
     </p:spTree>
   </p:cSld>
   <p:clrMapOvr>
@@ -3349,6 +3489,41 @@
           </a:p>
         </p:txBody>
       </p:sp>
+      <p:sp>
+        <p:nvSpPr>
+          <p:cNvPr id="3" name="TextBox 2"/>
+          <p:cNvSpPr txBox="1"/>
+          <p:nvPr/>
+        </p:nvSpPr>
+        <p:spPr>
+          <a:xfrm>
+            <a:off x="640080" y="3845052"/>
+            <a:ext cx="10911535" cy="310896"/>
+          </a:xfrm>
+          <a:prstGeom prst="rect">
+            <a:avLst/>
+          </a:prstGeom>
+          <a:noFill/>
+        </p:spPr>
+        <p:txBody>
+          <a:bodyPr wrap="square">
+            <a:spAutoFit/>
+          </a:bodyPr>
+          <a:lstStyle/>
+          <a:p>
+            <a:pPr algn="ctr"/>
+            <a:r>
+              <a:rPr sz="2000" b="0" i="0">
+                <a:solidFill>
+                  <a:srgbClr val="828282"/>
+                </a:solidFill>
+                <a:latin typeface="Arial"/>
+              </a:rPr>
+              <a:t>聖霊を信じます</a:t>
+            </a:r>
+          </a:p>
+        </p:txBody>
+      </p:sp>
     </p:spTree>
   </p:cSld>
   <p:clrMapOvr>
@@ -3515,6 +3690,76 @@
           </a:p>
         </p:txBody>
       </p:sp>
+      <p:sp>
+        <p:nvSpPr>
+          <p:cNvPr id="6" name="TextBox 5"/>
+          <p:cNvSpPr txBox="1"/>
+          <p:nvPr/>
+        </p:nvSpPr>
+        <p:spPr>
+          <a:xfrm>
+            <a:off x="640080" y="4530852"/>
+            <a:ext cx="10911535" cy="310896"/>
+          </a:xfrm>
+          <a:prstGeom prst="rect">
+            <a:avLst/>
+          </a:prstGeom>
+          <a:noFill/>
+        </p:spPr>
+        <p:txBody>
+          <a:bodyPr wrap="square">
+            <a:spAutoFit/>
+          </a:bodyPr>
+          <a:lstStyle/>
+          <a:p>
+            <a:pPr algn="ctr"/>
+            <a:r>
+              <a:rPr sz="2000" b="0" i="1">
+                <a:solidFill>
+                  <a:srgbClr val="828282"/>
+                </a:solidFill>
+                <a:latin typeface="Arial"/>
+              </a:rPr>
+              <a:t>Deus de julgamento e proteção</a:t>
+            </a:r>
+          </a:p>
+        </p:txBody>
+      </p:sp>
+      <p:sp>
+        <p:nvSpPr>
+          <p:cNvPr id="7" name="TextBox 6"/>
+          <p:cNvSpPr txBox="1"/>
+          <p:nvPr/>
+        </p:nvSpPr>
+        <p:spPr>
+          <a:xfrm>
+            <a:off x="640080" y="4896612"/>
+            <a:ext cx="10911535" cy="310896"/>
+          </a:xfrm>
+          <a:prstGeom prst="rect">
+            <a:avLst/>
+          </a:prstGeom>
+          <a:noFill/>
+        </p:spPr>
+        <p:txBody>
+          <a:bodyPr wrap="square">
+            <a:spAutoFit/>
+          </a:bodyPr>
+          <a:lstStyle/>
+          <a:p>
+            <a:pPr algn="ctr"/>
+            <a:r>
+              <a:rPr sz="2000" b="0" i="1">
+                <a:solidFill>
+                  <a:srgbClr val="828282"/>
+                </a:solidFill>
+                <a:latin typeface="Arial"/>
+              </a:rPr>
+              <a:t>Na cruz por minha causa</a:t>
+            </a:r>
+          </a:p>
+        </p:txBody>
+      </p:sp>
     </p:spTree>
   </p:cSld>
   <p:clrMapOvr>
@@ -3681,6 +3926,76 @@
           </a:p>
         </p:txBody>
       </p:sp>
+      <p:sp>
+        <p:nvSpPr>
+          <p:cNvPr id="6" name="TextBox 5"/>
+          <p:cNvSpPr txBox="1"/>
+          <p:nvPr/>
+        </p:nvSpPr>
+        <p:spPr>
+          <a:xfrm>
+            <a:off x="640080" y="4530852"/>
+            <a:ext cx="10911535" cy="310896"/>
+          </a:xfrm>
+          <a:prstGeom prst="rect">
+            <a:avLst/>
+          </a:prstGeom>
+          <a:noFill/>
+        </p:spPr>
+        <p:txBody>
+          <a:bodyPr wrap="square">
+            <a:spAutoFit/>
+          </a:bodyPr>
+          <a:lstStyle/>
+          <a:p>
+            <a:pPr algn="ctr"/>
+            <a:r>
+              <a:rPr sz="2000" b="0" i="1">
+                <a:solidFill>
+                  <a:srgbClr val="828282"/>
+                </a:solidFill>
+                <a:latin typeface="Arial"/>
+              </a:rPr>
+              <a:t>Mesmo descendo à escuridão</a:t>
+            </a:r>
+          </a:p>
+        </p:txBody>
+      </p:sp>
+      <p:sp>
+        <p:nvSpPr>
+          <p:cNvPr id="7" name="TextBox 6"/>
+          <p:cNvSpPr txBox="1"/>
+          <p:nvPr/>
+        </p:nvSpPr>
+        <p:spPr>
+          <a:xfrm>
+            <a:off x="640080" y="4896612"/>
+            <a:ext cx="10911535" cy="310896"/>
+          </a:xfrm>
+          <a:prstGeom prst="rect">
+            <a:avLst/>
+          </a:prstGeom>
+          <a:noFill/>
+        </p:spPr>
+        <p:txBody>
+          <a:bodyPr wrap="square">
+            <a:spAutoFit/>
+          </a:bodyPr>
+          <a:lstStyle/>
+          <a:p>
+            <a:pPr algn="ctr"/>
+            <a:r>
+              <a:rPr sz="2000" b="0" i="1">
+                <a:solidFill>
+                  <a:srgbClr val="828282"/>
+                </a:solidFill>
+                <a:latin typeface="Arial"/>
+              </a:rPr>
+              <a:t>Senhor Altíssimo que restaurou a vida</a:t>
+            </a:r>
+          </a:p>
+        </p:txBody>
+      </p:sp>
     </p:spTree>
   </p:cSld>
   <p:clrMapOvr>
@@ -4249,6 +4564,76 @@
           </a:p>
         </p:txBody>
       </p:sp>
+      <p:sp>
+        <p:nvSpPr>
+          <p:cNvPr id="4" name="TextBox 3"/>
+          <p:cNvSpPr txBox="1"/>
+          <p:nvPr/>
+        </p:nvSpPr>
+        <p:spPr>
+          <a:xfrm>
+            <a:off x="640080" y="4128516"/>
+            <a:ext cx="10911535" cy="310896"/>
+          </a:xfrm>
+          <a:prstGeom prst="rect">
+            <a:avLst/>
+          </a:prstGeom>
+          <a:noFill/>
+        </p:spPr>
+        <p:txBody>
+          <a:bodyPr wrap="square">
+            <a:spAutoFit/>
+          </a:bodyPr>
+          <a:lstStyle/>
+          <a:p>
+            <a:pPr algn="ctr"/>
+            <a:r>
+              <a:rPr sz="2000" b="0" i="0">
+                <a:solidFill>
+                  <a:srgbClr val="828282"/>
+                </a:solidFill>
+                <a:latin typeface="Arial"/>
+              </a:rPr>
+              <a:t>イエスの名を信じるから</a:t>
+            </a:r>
+          </a:p>
+        </p:txBody>
+      </p:sp>
+      <p:sp>
+        <p:nvSpPr>
+          <p:cNvPr id="5" name="TextBox 4"/>
+          <p:cNvSpPr txBox="1"/>
+          <p:nvPr/>
+        </p:nvSpPr>
+        <p:spPr>
+          <a:xfrm>
+            <a:off x="640080" y="4494276"/>
+            <a:ext cx="10911535" cy="310896"/>
+          </a:xfrm>
+          <a:prstGeom prst="rect">
+            <a:avLst/>
+          </a:prstGeom>
+          <a:noFill/>
+        </p:spPr>
+        <p:txBody>
+          <a:bodyPr wrap="square">
+            <a:spAutoFit/>
+          </a:bodyPr>
+          <a:lstStyle/>
+          <a:p>
+            <a:pPr algn="ctr"/>
+            <a:r>
+              <a:rPr sz="2000" b="0" i="0">
+                <a:solidFill>
+                  <a:srgbClr val="828282"/>
+                </a:solidFill>
+                <a:latin typeface="Arial"/>
+              </a:rPr>
+              <a:t>私たちのさばき主また弁護者</a:t>
+            </a:r>
+          </a:p>
+        </p:txBody>
+      </p:sp>
     </p:spTree>
   </p:cSld>
   <p:clrMapOvr>
@@ -4310,6 +4695,41 @@
           </a:p>
         </p:txBody>
       </p:sp>
+      <p:sp>
+        <p:nvSpPr>
+          <p:cNvPr id="3" name="TextBox 2"/>
+          <p:cNvSpPr txBox="1"/>
+          <p:nvPr/>
+        </p:nvSpPr>
+        <p:spPr>
+          <a:xfrm>
+            <a:off x="640080" y="3845052"/>
+            <a:ext cx="10911535" cy="310896"/>
+          </a:xfrm>
+          <a:prstGeom prst="rect">
+            <a:avLst/>
+          </a:prstGeom>
+          <a:noFill/>
+        </p:spPr>
+        <p:txBody>
+          <a:bodyPr wrap="square">
+            <a:spAutoFit/>
+          </a:bodyPr>
+          <a:lstStyle/>
+          <a:p>
+            <a:pPr algn="ctr"/>
+            <a:r>
+              <a:rPr sz="2000" b="0" i="0">
+                <a:solidFill>
+                  <a:srgbClr val="828282"/>
+                </a:solidFill>
+                <a:latin typeface="Arial"/>
+              </a:rPr>
+              <a:t>苦しみを受け、十字架につけられた</a:t>
+            </a:r>
+          </a:p>
+        </p:txBody>
+      </p:sp>
     </p:spTree>
   </p:cSld>
   <p:clrMapOvr>
@@ -4878,6 +5298,76 @@
           </a:p>
         </p:txBody>
       </p:sp>
+      <p:sp>
+        <p:nvSpPr>
+          <p:cNvPr id="4" name="TextBox 3"/>
+          <p:cNvSpPr txBox="1"/>
+          <p:nvPr/>
+        </p:nvSpPr>
+        <p:spPr>
+          <a:xfrm>
+            <a:off x="640080" y="4128516"/>
+            <a:ext cx="10911535" cy="310896"/>
+          </a:xfrm>
+          <a:prstGeom prst="rect">
+            <a:avLst/>
+          </a:prstGeom>
+          <a:noFill/>
+        </p:spPr>
+        <p:txBody>
+          <a:bodyPr wrap="square">
+            <a:spAutoFit/>
+          </a:bodyPr>
+          <a:lstStyle/>
+          <a:p>
+            <a:pPr algn="ctr"/>
+            <a:r>
+              <a:rPr sz="2000" b="0" i="0">
+                <a:solidFill>
+                  <a:srgbClr val="828282"/>
+                </a:solidFill>
+                <a:latin typeface="Arial"/>
+              </a:rPr>
+              <a:t>すべてのもの創造者</a:t>
+            </a:r>
+          </a:p>
+        </p:txBody>
+      </p:sp>
+      <p:sp>
+        <p:nvSpPr>
+          <p:cNvPr id="5" name="TextBox 4"/>
+          <p:cNvSpPr txBox="1"/>
+          <p:nvPr/>
+        </p:nvSpPr>
+        <p:spPr>
+          <a:xfrm>
+            <a:off x="640080" y="4494276"/>
+            <a:ext cx="10911535" cy="310896"/>
+          </a:xfrm>
+          <a:prstGeom prst="rect">
+            <a:avLst/>
+          </a:prstGeom>
+          <a:noFill/>
+        </p:spPr>
+        <p:txBody>
+          <a:bodyPr wrap="square">
+            <a:spAutoFit/>
+          </a:bodyPr>
+          <a:lstStyle/>
+          <a:p>
+            <a:pPr algn="ctr"/>
+            <a:r>
+              <a:rPr sz="2000" b="0" i="0">
+                <a:solidFill>
+                  <a:srgbClr val="828282"/>
+                </a:solidFill>
+                <a:latin typeface="Arial"/>
+              </a:rPr>
+              <a:t>全能の神</a:t>
+            </a:r>
+          </a:p>
+        </p:txBody>
+      </p:sp>
     </p:spTree>
   </p:cSld>
   <p:clrMapOvr>
@@ -5638,6 +6128,76 @@
           </a:p>
         </p:txBody>
       </p:sp>
+      <p:sp>
+        <p:nvSpPr>
+          <p:cNvPr id="4" name="TextBox 3"/>
+          <p:cNvSpPr txBox="1"/>
+          <p:nvPr/>
+        </p:nvSpPr>
+        <p:spPr>
+          <a:xfrm>
+            <a:off x="640080" y="4128516"/>
+            <a:ext cx="10911535" cy="310896"/>
+          </a:xfrm>
+          <a:prstGeom prst="rect">
+            <a:avLst/>
+          </a:prstGeom>
+          <a:noFill/>
+        </p:spPr>
+        <p:txBody>
+          <a:bodyPr wrap="square">
+            <a:spAutoFit/>
+          </a:bodyPr>
+          <a:lstStyle/>
+          <a:p>
+            <a:pPr algn="ctr"/>
+            <a:r>
+              <a:rPr sz="2000" b="0" i="0">
+                <a:solidFill>
+                  <a:srgbClr val="828282"/>
+                </a:solidFill>
+                <a:latin typeface="Arial"/>
+              </a:rPr>
+              <a:t>深みに降られた</a:t>
+            </a:r>
+          </a:p>
+        </p:txBody>
+      </p:sp>
+      <p:sp>
+        <p:nvSpPr>
+          <p:cNvPr id="5" name="TextBox 4"/>
+          <p:cNvSpPr txBox="1"/>
+          <p:nvPr/>
+        </p:nvSpPr>
+        <p:spPr>
+          <a:xfrm>
+            <a:off x="640080" y="4494276"/>
+            <a:ext cx="10911535" cy="310896"/>
+          </a:xfrm>
+          <a:prstGeom prst="rect">
+            <a:avLst/>
+          </a:prstGeom>
+          <a:noFill/>
+        </p:spPr>
+        <p:txBody>
+          <a:bodyPr wrap="square">
+            <a:spAutoFit/>
+          </a:bodyPr>
+          <a:lstStyle/>
+          <a:p>
+            <a:pPr algn="ctr"/>
+            <a:r>
+              <a:rPr sz="2000" b="0" i="0">
+                <a:solidFill>
+                  <a:srgbClr val="828282"/>
+                </a:solidFill>
+                <a:latin typeface="Arial"/>
+              </a:rPr>
+              <a:t>栄光の命に復活された</a:t>
+            </a:r>
+          </a:p>
+        </p:txBody>
+      </p:sp>
     </p:spTree>
   </p:cSld>
   <p:clrMapOvr>
@@ -5734,6 +6294,76 @@
           </a:p>
         </p:txBody>
       </p:sp>
+      <p:sp>
+        <p:nvSpPr>
+          <p:cNvPr id="4" name="TextBox 3"/>
+          <p:cNvSpPr txBox="1"/>
+          <p:nvPr/>
+        </p:nvSpPr>
+        <p:spPr>
+          <a:xfrm>
+            <a:off x="640080" y="4128516"/>
+            <a:ext cx="10911535" cy="310896"/>
+          </a:xfrm>
+          <a:prstGeom prst="rect">
+            <a:avLst/>
+          </a:prstGeom>
+          <a:noFill/>
+        </p:spPr>
+        <p:txBody>
+          <a:bodyPr wrap="square">
+            <a:spAutoFit/>
+          </a:bodyPr>
+          <a:lstStyle/>
+          <a:p>
+            <a:pPr algn="ctr"/>
+            <a:r>
+              <a:rPr sz="2000" b="0" i="0">
+                <a:solidFill>
+                  <a:srgbClr val="828282"/>
+                </a:solidFill>
+                <a:latin typeface="Arial"/>
+              </a:rPr>
+              <a:t>いつも高き所に座して</a:t>
+            </a:r>
+          </a:p>
+        </p:txBody>
+      </p:sp>
+      <p:sp>
+        <p:nvSpPr>
+          <p:cNvPr id="5" name="TextBox 4"/>
+          <p:cNvSpPr txBox="1"/>
+          <p:nvPr/>
+        </p:nvSpPr>
+        <p:spPr>
+          <a:xfrm>
+            <a:off x="640080" y="4494276"/>
+            <a:ext cx="10911535" cy="310896"/>
+          </a:xfrm>
+          <a:prstGeom prst="rect">
+            <a:avLst/>
+          </a:prstGeom>
+          <a:noFill/>
+        </p:spPr>
+        <p:txBody>
+          <a:bodyPr wrap="square">
+            <a:spAutoFit/>
+          </a:bodyPr>
+          <a:lstStyle/>
+          <a:p>
+            <a:pPr algn="ctr"/>
+            <a:r>
+              <a:rPr sz="2000" b="0" i="0">
+                <a:solidFill>
+                  <a:srgbClr val="828282"/>
+                </a:solidFill>
+                <a:latin typeface="Arial"/>
+              </a:rPr>
+              <a:t>そして再び来られて治める</a:t>
+            </a:r>
+          </a:p>
+        </p:txBody>
+      </p:sp>
     </p:spTree>
   </p:cSld>
   <p:clrMapOvr>
@@ -5830,6 +6460,76 @@
           </a:p>
         </p:txBody>
       </p:sp>
+      <p:sp>
+        <p:nvSpPr>
+          <p:cNvPr id="4" name="TextBox 3"/>
+          <p:cNvSpPr txBox="1"/>
+          <p:nvPr/>
+        </p:nvSpPr>
+        <p:spPr>
+          <a:xfrm>
+            <a:off x="640080" y="4128516"/>
+            <a:ext cx="10911535" cy="310896"/>
+          </a:xfrm>
+          <a:prstGeom prst="rect">
+            <a:avLst/>
+          </a:prstGeom>
+          <a:noFill/>
+        </p:spPr>
+        <p:txBody>
+          <a:bodyPr wrap="square">
+            <a:spAutoFit/>
+          </a:bodyPr>
+          <a:lstStyle/>
+          <a:p>
+            <a:pPr algn="ctr"/>
+            <a:r>
+              <a:rPr sz="2000" b="0" i="0">
+                <a:solidFill>
+                  <a:srgbClr val="828282"/>
+                </a:solidFill>
+                <a:latin typeface="Arial"/>
+              </a:rPr>
+              <a:t>私たちの父なる神を信じます</a:t>
+            </a:r>
+          </a:p>
+        </p:txBody>
+      </p:sp>
+      <p:sp>
+        <p:nvSpPr>
+          <p:cNvPr id="5" name="TextBox 4"/>
+          <p:cNvSpPr txBox="1"/>
+          <p:nvPr/>
+        </p:nvSpPr>
+        <p:spPr>
+          <a:xfrm>
+            <a:off x="640080" y="4494276"/>
+            <a:ext cx="10911535" cy="310896"/>
+          </a:xfrm>
+          <a:prstGeom prst="rect">
+            <a:avLst/>
+          </a:prstGeom>
+          <a:noFill/>
+        </p:spPr>
+        <p:txBody>
+          <a:bodyPr wrap="square">
+            <a:spAutoFit/>
+          </a:bodyPr>
+          <a:lstStyle/>
+          <a:p>
+            <a:pPr algn="ctr"/>
+            <a:r>
+              <a:rPr sz="2000" b="0" i="0">
+                <a:solidFill>
+                  <a:srgbClr val="828282"/>
+                </a:solidFill>
+                <a:latin typeface="Arial"/>
+              </a:rPr>
+              <a:t>御子キリストを信じます</a:t>
+            </a:r>
+          </a:p>
+        </p:txBody>
+      </p:sp>
     </p:spTree>
   </p:cSld>
   <p:clrMapOvr>
@@ -5891,6 +6591,41 @@
           </a:p>
         </p:txBody>
       </p:sp>
+      <p:sp>
+        <p:nvSpPr>
+          <p:cNvPr id="3" name="TextBox 2"/>
+          <p:cNvSpPr txBox="1"/>
+          <p:nvPr/>
+        </p:nvSpPr>
+        <p:spPr>
+          <a:xfrm>
+            <a:off x="640080" y="3845052"/>
+            <a:ext cx="10911535" cy="310896"/>
+          </a:xfrm>
+          <a:prstGeom prst="rect">
+            <a:avLst/>
+          </a:prstGeom>
+          <a:noFill/>
+        </p:spPr>
+        <p:txBody>
+          <a:bodyPr wrap="square">
+            <a:spAutoFit/>
+          </a:bodyPr>
+          <a:lstStyle/>
+          <a:p>
+            <a:pPr algn="ctr"/>
+            <a:r>
+              <a:rPr sz="2000" b="0" i="0">
+                <a:solidFill>
+                  <a:srgbClr val="828282"/>
+                </a:solidFill>
+                <a:latin typeface="Arial"/>
+              </a:rPr>
+              <a:t>聖霊を信じます</a:t>
+            </a:r>
+          </a:p>
+        </p:txBody>
+      </p:sp>
     </p:spTree>
   </p:cSld>
   <p:clrMapOvr>
@@ -5987,6 +6722,76 @@
           </a:p>
         </p:txBody>
       </p:sp>
+      <p:sp>
+        <p:nvSpPr>
+          <p:cNvPr id="4" name="TextBox 3"/>
+          <p:cNvSpPr txBox="1"/>
+          <p:nvPr/>
+        </p:nvSpPr>
+        <p:spPr>
+          <a:xfrm>
+            <a:off x="640080" y="4128516"/>
+            <a:ext cx="10911535" cy="310896"/>
+          </a:xfrm>
+          <a:prstGeom prst="rect">
+            <a:avLst/>
+          </a:prstGeom>
+          <a:noFill/>
+        </p:spPr>
+        <p:txBody>
+          <a:bodyPr wrap="square">
+            <a:spAutoFit/>
+          </a:bodyPr>
+          <a:lstStyle/>
+          <a:p>
+            <a:pPr algn="ctr"/>
+            <a:r>
+              <a:rPr sz="2000" b="0" i="0">
+                <a:solidFill>
+                  <a:srgbClr val="828282"/>
+                </a:solidFill>
+                <a:latin typeface="Arial"/>
+              </a:rPr>
+              <a:t>聖霊を通して</a:t>
+            </a:r>
+          </a:p>
+        </p:txBody>
+      </p:sp>
+      <p:sp>
+        <p:nvSpPr>
+          <p:cNvPr id="5" name="TextBox 4"/>
+          <p:cNvSpPr txBox="1"/>
+          <p:nvPr/>
+        </p:nvSpPr>
+        <p:spPr>
+          <a:xfrm>
+            <a:off x="640080" y="4494276"/>
+            <a:ext cx="10911535" cy="310896"/>
+          </a:xfrm>
+          <a:prstGeom prst="rect">
+            <a:avLst/>
+          </a:prstGeom>
+          <a:noFill/>
+        </p:spPr>
+        <p:txBody>
+          <a:bodyPr wrap="square">
+            <a:spAutoFit/>
+          </a:bodyPr>
+          <a:lstStyle/>
+          <a:p>
+            <a:pPr algn="ctr"/>
+            <a:r>
+              <a:rPr sz="2000" b="0" i="0">
+                <a:solidFill>
+                  <a:srgbClr val="828282"/>
+                </a:solidFill>
+                <a:latin typeface="Arial"/>
+              </a:rPr>
+              <a:t>キリスト、御子をお生みになった</a:t>
+            </a:r>
+          </a:p>
+        </p:txBody>
+      </p:sp>
     </p:spTree>
   </p:cSld>
   <p:clrMapOvr>
@@ -6747,6 +7552,76 @@
           </a:p>
         </p:txBody>
       </p:sp>
+      <p:sp>
+        <p:nvSpPr>
+          <p:cNvPr id="4" name="TextBox 3"/>
+          <p:cNvSpPr txBox="1"/>
+          <p:nvPr/>
+        </p:nvSpPr>
+        <p:spPr>
+          <a:xfrm>
+            <a:off x="640080" y="4128516"/>
+            <a:ext cx="10911535" cy="310896"/>
+          </a:xfrm>
+          <a:prstGeom prst="rect">
+            <a:avLst/>
+          </a:prstGeom>
+          <a:noFill/>
+        </p:spPr>
+        <p:txBody>
+          <a:bodyPr wrap="square">
+            <a:spAutoFit/>
+          </a:bodyPr>
+          <a:lstStyle/>
+          <a:p>
+            <a:pPr algn="ctr"/>
+            <a:r>
+              <a:rPr sz="2000" b="0" i="0">
+                <a:solidFill>
+                  <a:srgbClr val="828282"/>
+                </a:solidFill>
+                <a:latin typeface="Arial"/>
+              </a:rPr>
+              <a:t>深みに降られた</a:t>
+            </a:r>
+          </a:p>
+        </p:txBody>
+      </p:sp>
+      <p:sp>
+        <p:nvSpPr>
+          <p:cNvPr id="5" name="TextBox 4"/>
+          <p:cNvSpPr txBox="1"/>
+          <p:nvPr/>
+        </p:nvSpPr>
+        <p:spPr>
+          <a:xfrm>
+            <a:off x="640080" y="4494276"/>
+            <a:ext cx="10911535" cy="310896"/>
+          </a:xfrm>
+          <a:prstGeom prst="rect">
+            <a:avLst/>
+          </a:prstGeom>
+          <a:noFill/>
+        </p:spPr>
+        <p:txBody>
+          <a:bodyPr wrap="square">
+            <a:spAutoFit/>
+          </a:bodyPr>
+          <a:lstStyle/>
+          <a:p>
+            <a:pPr algn="ctr"/>
+            <a:r>
+              <a:rPr sz="2000" b="0" i="0">
+                <a:solidFill>
+                  <a:srgbClr val="828282"/>
+                </a:solidFill>
+                <a:latin typeface="Arial"/>
+              </a:rPr>
+              <a:t>栄光の命に復活された</a:t>
+            </a:r>
+          </a:p>
+        </p:txBody>
+      </p:sp>
     </p:spTree>
   </p:cSld>
   <p:clrMapOvr>
@@ -6839,6 +7714,76 @@
                 <a:latin typeface="Arial"/>
               </a:rPr>
               <a:t>E retornará para reinar</a:t>
+            </a:r>
+          </a:p>
+        </p:txBody>
+      </p:sp>
+      <p:sp>
+        <p:nvSpPr>
+          <p:cNvPr id="4" name="TextBox 3"/>
+          <p:cNvSpPr txBox="1"/>
+          <p:nvPr/>
+        </p:nvSpPr>
+        <p:spPr>
+          <a:xfrm>
+            <a:off x="640080" y="4128516"/>
+            <a:ext cx="10911535" cy="310896"/>
+          </a:xfrm>
+          <a:prstGeom prst="rect">
+            <a:avLst/>
+          </a:prstGeom>
+          <a:noFill/>
+        </p:spPr>
+        <p:txBody>
+          <a:bodyPr wrap="square">
+            <a:spAutoFit/>
+          </a:bodyPr>
+          <a:lstStyle/>
+          <a:p>
+            <a:pPr algn="ctr"/>
+            <a:r>
+              <a:rPr sz="2000" b="0" i="0">
+                <a:solidFill>
+                  <a:srgbClr val="828282"/>
+                </a:solidFill>
+                <a:latin typeface="Arial"/>
+              </a:rPr>
+              <a:t>いつも高き所に座して</a:t>
+            </a:r>
+          </a:p>
+        </p:txBody>
+      </p:sp>
+      <p:sp>
+        <p:nvSpPr>
+          <p:cNvPr id="5" name="TextBox 4"/>
+          <p:cNvSpPr txBox="1"/>
+          <p:nvPr/>
+        </p:nvSpPr>
+        <p:spPr>
+          <a:xfrm>
+            <a:off x="640080" y="4494276"/>
+            <a:ext cx="10911535" cy="310896"/>
+          </a:xfrm>
+          <a:prstGeom prst="rect">
+            <a:avLst/>
+          </a:prstGeom>
+          <a:noFill/>
+        </p:spPr>
+        <p:txBody>
+          <a:bodyPr wrap="square">
+            <a:spAutoFit/>
+          </a:bodyPr>
+          <a:lstStyle/>
+          <a:p>
+            <a:pPr algn="ctr"/>
+            <a:r>
+              <a:rPr sz="2000" b="0" i="0">
+                <a:solidFill>
+                  <a:srgbClr val="828282"/>
+                </a:solidFill>
+                <a:latin typeface="Arial"/>
+              </a:rPr>
+              <a:t>そして再び来られて治める</a:t>
             </a:r>
           </a:p>
         </p:txBody>
